--- a/preview_v7/cn/l-cn-bs-u4-8.pptx
+++ b/preview_v7/cn/l-cn-bs-u4-8.pptx
@@ -3142,14 +3142,58 @@
       </p:sp>
       <p:sp>
         <p:nvSpPr>
-          <p:cNvPr id="3" name="TextBox 2"/>
+          <p:cNvPr id="3" name="Rectangle 2"/>
+          <p:cNvSpPr/>
+          <p:nvPr/>
+        </p:nvSpPr>
+        <p:spPr>
+          <a:xfrm>
+            <a:off x="640080" y="502920"/>
+            <a:ext cx="822960" cy="38100"/>
+          </a:xfrm>
+          <a:prstGeom prst="rect">
+            <a:avLst/>
+          </a:prstGeom>
+          <a:solidFill>
+            <a:srgbClr val="C8A86B"/>
+          </a:solidFill>
+          <a:ln>
+            <a:noFill/>
+          </a:ln>
+          <a:effectLst/>
+        </p:spPr>
+        <p:style>
+          <a:lnRef idx="1">
+            <a:schemeClr val="accent1"/>
+          </a:lnRef>
+          <a:fillRef idx="3">
+            <a:schemeClr val="accent1"/>
+          </a:fillRef>
+          <a:effectRef idx="2">
+            <a:schemeClr val="accent1"/>
+          </a:effectRef>
+          <a:fontRef idx="minor">
+            <a:schemeClr val="lt1"/>
+          </a:fontRef>
+        </p:style>
+        <p:txBody>
+          <a:bodyPr rtlCol="0" anchor="ctr"/>
+          <a:lstStyle/>
+          <a:p>
+            <a:pPr algn="ctr"/>
+          </a:p>
+        </p:txBody>
+      </p:sp>
+      <p:sp>
+        <p:nvSpPr>
+          <p:cNvPr id="4" name="TextBox 3"/>
           <p:cNvSpPr txBox="1"/>
           <p:nvPr/>
         </p:nvSpPr>
         <p:spPr>
           <a:xfrm>
-            <a:off x="640080" y="640080"/>
-            <a:ext cx="10911535" cy="502920"/>
+            <a:off x="640080" y="868680"/>
+            <a:ext cx="6400800" cy="365760"/>
           </a:xfrm>
           <a:prstGeom prst="rect">
             <a:avLst/>
@@ -3168,7 +3212,7 @@
               </a:spcAft>
             </a:pPr>
             <a:r>
-              <a:rPr sz="1200" b="1">
+              <a:rPr sz="1300" b="1">
                 <a:solidFill>
                   <a:srgbClr val="B23A2A"/>
                 </a:solidFill>
@@ -3176,20 +3220,20 @@
                 <a:ea typeface="微软雅黑"/>
                 <a:cs typeface="微软雅黑"/>
               </a:rPr>
-              <a:t>语文 · 必修上册 · 第4单元 家乡文化生活</a:t>
-            </a:r>
-          </a:p>
-        </p:txBody>
-      </p:sp>
-      <p:sp>
-        <p:nvSpPr>
-          <p:cNvPr id="4" name="Rectangle 3"/>
+              <a:t>必修上册 · 第4单元 家乡文化生活 · 第8课时</a:t>
+            </a:r>
+          </a:p>
+        </p:txBody>
+      </p:sp>
+      <p:sp>
+        <p:nvSpPr>
+          <p:cNvPr id="5" name="Rectangle 4"/>
           <p:cNvSpPr/>
           <p:nvPr/>
         </p:nvSpPr>
         <p:spPr>
           <a:xfrm>
-            <a:off x="640080" y="1207008"/>
+            <a:off x="640080" y="1325880"/>
             <a:ext cx="822960" cy="30480"/>
           </a:xfrm>
           <a:prstGeom prst="rect">
@@ -3227,14 +3271,14 @@
       </p:sp>
       <p:sp>
         <p:nvSpPr>
-          <p:cNvPr id="5" name="TextBox 4"/>
+          <p:cNvPr id="6" name="TextBox 5"/>
           <p:cNvSpPr txBox="1"/>
           <p:nvPr/>
         </p:nvSpPr>
         <p:spPr>
           <a:xfrm>
-            <a:off x="640080" y="1737360"/>
-            <a:ext cx="10911535" cy="2011680"/>
+            <a:off x="640080" y="1783080"/>
+            <a:ext cx="11155680" cy="1188720"/>
           </a:xfrm>
           <a:prstGeom prst="rect">
             <a:avLst/>
@@ -3249,7 +3293,7 @@
           <a:p>
             <a:pPr algn="l">
               <a:lnSpc>
-                <a:spcPct val="115000"/>
+                <a:spcPct val="120000"/>
               </a:lnSpc>
             </a:pPr>
             <a:r>
@@ -3261,21 +3305,21 @@
                 <a:ea typeface="楷体"/>
                 <a:cs typeface="楷体"/>
               </a:rPr>
-              <a:t>单元活动——「家乡文化」分享会与成果展示</a:t>
-            </a:r>
-          </a:p>
-        </p:txBody>
-      </p:sp>
-      <p:sp>
-        <p:nvSpPr>
-          <p:cNvPr id="6" name="TextBox 5"/>
+              <a:t>单元活动</a:t>
+            </a:r>
+          </a:p>
+        </p:txBody>
+      </p:sp>
+      <p:sp>
+        <p:nvSpPr>
+          <p:cNvPr id="7" name="TextBox 6"/>
           <p:cNvSpPr txBox="1"/>
           <p:nvPr/>
         </p:nvSpPr>
         <p:spPr>
           <a:xfrm>
-            <a:off x="640080" y="3840480"/>
-            <a:ext cx="10911535" cy="457200"/>
+            <a:off x="640080" y="2880360"/>
+            <a:ext cx="11155680" cy="822960"/>
           </a:xfrm>
           <a:prstGeom prst="rect">
             <a:avLst/>
@@ -3290,103 +3334,100 @@
           <a:p>
             <a:pPr algn="l"/>
             <a:r>
-              <a:rPr sz="1700" b="1">
+              <a:rPr sz="2200" b="1">
                 <a:solidFill>
                   <a:srgbClr val="B23A2A"/>
+                </a:solidFill>
+                <a:latin typeface="楷体"/>
+                <a:ea typeface="楷体"/>
+                <a:cs typeface="楷体"/>
+              </a:rPr>
+              <a:t>「家乡文化」分享会与成果展示</a:t>
+            </a:r>
+          </a:p>
+        </p:txBody>
+      </p:sp>
+      <p:sp>
+        <p:nvSpPr>
+          <p:cNvPr id="8" name="TextBox 7"/>
+          <p:cNvSpPr txBox="1"/>
+          <p:nvPr/>
+        </p:nvSpPr>
+        <p:spPr>
+          <a:xfrm>
+            <a:off x="640080" y="3977639"/>
+            <a:ext cx="10972800" cy="1188720"/>
+          </a:xfrm>
+          <a:prstGeom prst="rect">
+            <a:avLst/>
+          </a:prstGeom>
+          <a:noFill/>
+        </p:spPr>
+        <p:txBody>
+          <a:bodyPr wrap="square" anchor="t" lIns="0" rIns="0" tIns="0" bIns="0">
+            <a:spAutoFit/>
+          </a:bodyPr>
+          <a:lstStyle/>
+          <a:p>
+            <a:pPr algn="l">
+              <a:lnSpc>
+                <a:spcPct val="150000"/>
+              </a:lnSpc>
+            </a:pPr>
+            <a:r>
+              <a:rPr sz="1600" b="0">
+                <a:solidFill>
+                  <a:srgbClr val="6B6258"/>
+                </a:solidFill>
+                <a:latin typeface="楷体"/>
+                <a:ea typeface="楷体"/>
+                <a:cs typeface="楷体"/>
+              </a:rPr>
+              <a:t>把调查、写作和倡议串起来，为家乡做一件实在的事。</a:t>
+            </a:r>
+          </a:p>
+        </p:txBody>
+      </p:sp>
+      <p:sp>
+        <p:nvSpPr>
+          <p:cNvPr id="9" name="TextBox 8"/>
+          <p:cNvSpPr txBox="1"/>
+          <p:nvPr/>
+        </p:nvSpPr>
+        <p:spPr>
+          <a:xfrm>
+            <a:off x="640080" y="6355080"/>
+            <a:ext cx="8229600" cy="365760"/>
+          </a:xfrm>
+          <a:prstGeom prst="rect">
+            <a:avLst/>
+          </a:prstGeom>
+          <a:noFill/>
+        </p:spPr>
+        <p:txBody>
+          <a:bodyPr wrap="square" anchor="t" lIns="0" rIns="0" tIns="0" bIns="0">
+            <a:spAutoFit/>
+          </a:bodyPr>
+          <a:lstStyle/>
+          <a:p>
+            <a:pPr algn="l"/>
+            <a:r>
+              <a:rPr sz="1200" b="0">
+                <a:solidFill>
+                  <a:srgbClr val="6B6258"/>
                 </a:solidFill>
                 <a:latin typeface="微软雅黑"/>
                 <a:ea typeface="微软雅黑"/>
                 <a:cs typeface="微软雅黑"/>
               </a:rPr>
-              <a:t>单元活动  ·  第8课时  ·  45分钟</a:t>
-            </a:r>
-          </a:p>
-        </p:txBody>
-      </p:sp>
-      <p:sp>
-        <p:nvSpPr>
-          <p:cNvPr id="7" name="Rectangle 6"/>
-          <p:cNvSpPr/>
-          <p:nvPr/>
-        </p:nvSpPr>
-        <p:spPr>
-          <a:xfrm>
-            <a:off x="640080" y="5394960"/>
-            <a:ext cx="2011680" cy="33020"/>
-          </a:xfrm>
-          <a:prstGeom prst="rect">
-            <a:avLst/>
-          </a:prstGeom>
-          <a:solidFill>
-            <a:srgbClr val="C8A86B"/>
-          </a:solidFill>
-          <a:ln>
-            <a:noFill/>
-          </a:ln>
-          <a:effectLst/>
-        </p:spPr>
-        <p:style>
-          <a:lnRef idx="1">
-            <a:schemeClr val="accent1"/>
-          </a:lnRef>
-          <a:fillRef idx="3">
-            <a:schemeClr val="accent1"/>
-          </a:fillRef>
-          <a:effectRef idx="2">
-            <a:schemeClr val="accent1"/>
-          </a:effectRef>
-          <a:fontRef idx="minor">
-            <a:schemeClr val="lt1"/>
-          </a:fontRef>
-        </p:style>
-        <p:txBody>
-          <a:bodyPr rtlCol="0" anchor="ctr"/>
-          <a:lstStyle/>
-          <a:p>
-            <a:pPr algn="ctr"/>
-          </a:p>
-        </p:txBody>
-      </p:sp>
-      <p:sp>
-        <p:nvSpPr>
-          <p:cNvPr id="8" name="TextBox 7"/>
-          <p:cNvSpPr txBox="1"/>
-          <p:nvPr/>
-        </p:nvSpPr>
-        <p:spPr>
-          <a:xfrm>
-            <a:off x="640080" y="5623560"/>
-            <a:ext cx="10911535" cy="548640"/>
-          </a:xfrm>
-          <a:prstGeom prst="rect">
-            <a:avLst/>
-          </a:prstGeom>
-          <a:noFill/>
-        </p:spPr>
-        <p:txBody>
-          <a:bodyPr wrap="square" anchor="t" lIns="0" rIns="0" tIns="0" bIns="0">
-            <a:spAutoFit/>
-          </a:bodyPr>
-          <a:lstStyle/>
-          <a:p>
-            <a:pPr algn="l"/>
-            <a:r>
-              <a:rPr sz="1400" b="0">
-                <a:solidFill>
-                  <a:srgbClr val="6B6258"/>
-                </a:solidFill>
-                <a:latin typeface="微软雅黑"/>
-                <a:ea typeface="微软雅黑"/>
-                <a:cs typeface="微软雅黑"/>
-              </a:rPr>
-              <a:t>学习任务群：当代文化参与    |    年级：高一</a:t>
-            </a:r>
-          </a:p>
-        </p:txBody>
-      </p:sp>
-      <p:sp>
-        <p:nvSpPr>
-          <p:cNvPr id="9" name="TextBox 8"/>
+              <a:t>学生课堂版 · 共 9 页</a:t>
+            </a:r>
+          </a:p>
+        </p:txBody>
+      </p:sp>
+      <p:sp>
+        <p:nvSpPr>
+          <p:cNvPr id="10" name="TextBox 9"/>
           <p:cNvSpPr txBox="1"/>
           <p:nvPr/>
         </p:nvSpPr>
@@ -3570,14 +3611,51 @@
       </p:sp>
       <p:sp>
         <p:nvSpPr>
-          <p:cNvPr id="5" name="Rounded Rectangle 4"/>
+          <p:cNvPr id="5" name="TextBox 4"/>
+          <p:cNvSpPr txBox="1"/>
+          <p:nvPr/>
+        </p:nvSpPr>
+        <p:spPr>
+          <a:xfrm>
+            <a:off x="640080" y="1280160"/>
+            <a:ext cx="10058400" cy="548640"/>
+          </a:xfrm>
+          <a:prstGeom prst="rect">
+            <a:avLst/>
+          </a:prstGeom>
+          <a:noFill/>
+        </p:spPr>
+        <p:txBody>
+          <a:bodyPr wrap="square" anchor="t" lIns="0" rIns="0" tIns="0" bIns="0">
+            <a:spAutoFit/>
+          </a:bodyPr>
+          <a:lstStyle/>
+          <a:p>
+            <a:pPr algn="l"/>
+            <a:r>
+              <a:rPr sz="3000" b="1">
+                <a:solidFill>
+                  <a:srgbClr val="1C2A33"/>
+                </a:solidFill>
+                <a:latin typeface="楷体"/>
+                <a:ea typeface="楷体"/>
+                <a:cs typeface="楷体"/>
+              </a:rPr>
+              <a:t>四向目标</a:t>
+            </a:r>
+          </a:p>
+        </p:txBody>
+      </p:sp>
+      <p:sp>
+        <p:nvSpPr>
+          <p:cNvPr id="6" name="Rounded Rectangle 5"/>
           <p:cNvSpPr/>
           <p:nvPr/>
         </p:nvSpPr>
         <p:spPr>
           <a:xfrm>
-            <a:off x="640080" y="1417320"/>
-            <a:ext cx="5349240" cy="2057400"/>
+            <a:off x="640080" y="1965960"/>
+            <a:ext cx="5272887" cy="1965960"/>
           </a:xfrm>
           <a:prstGeom prst="roundRect">
             <a:avLst/>
@@ -3585,7 +3663,7 @@
           <a:solidFill>
             <a:srgbClr val="FFFFFF"/>
           </a:solidFill>
-          <a:ln w="22860">
+          <a:ln w="20320">
             <a:solidFill>
               <a:srgbClr val="B23A2A"/>
             </a:solidFill>
@@ -3616,23 +3694,103 @@
       </p:sp>
       <p:sp>
         <p:nvSpPr>
-          <p:cNvPr id="6" name="Oval 5"/>
+          <p:cNvPr id="7" name="TextBox 6"/>
+          <p:cNvSpPr txBox="1"/>
+          <p:nvPr/>
+        </p:nvSpPr>
+        <p:spPr>
+          <a:xfrm>
+            <a:off x="914400" y="2167128"/>
+            <a:ext cx="4724247" cy="457200"/>
+          </a:xfrm>
+          <a:prstGeom prst="rect">
+            <a:avLst/>
+          </a:prstGeom>
+          <a:noFill/>
+        </p:spPr>
+        <p:txBody>
+          <a:bodyPr wrap="square" anchor="t" lIns="0" rIns="0" tIns="0" bIns="0">
+            <a:spAutoFit/>
+          </a:bodyPr>
+          <a:lstStyle/>
+          <a:p>
+            <a:pPr algn="l"/>
+            <a:r>
+              <a:rPr sz="1800" b="1">
+                <a:solidFill>
+                  <a:srgbClr val="B23A2A"/>
+                </a:solidFill>
+                <a:latin typeface="微软雅黑"/>
+                <a:ea typeface="微软雅黑"/>
+                <a:cs typeface="微软雅黑"/>
+              </a:rPr>
+              <a:t>语言能力</a:t>
+            </a:r>
+          </a:p>
+        </p:txBody>
+      </p:sp>
+      <p:sp>
+        <p:nvSpPr>
+          <p:cNvPr id="8" name="TextBox 7"/>
+          <p:cNvSpPr txBox="1"/>
+          <p:nvPr/>
+        </p:nvSpPr>
+        <p:spPr>
+          <a:xfrm>
+            <a:off x="914400" y="2743200"/>
+            <a:ext cx="4724247" cy="1005840"/>
+          </a:xfrm>
+          <a:prstGeom prst="rect">
+            <a:avLst/>
+          </a:prstGeom>
+          <a:noFill/>
+        </p:spPr>
+        <p:txBody>
+          <a:bodyPr wrap="square" anchor="t" lIns="0" rIns="0" tIns="0" bIns="0">
+            <a:spAutoFit/>
+          </a:bodyPr>
+          <a:lstStyle/>
+          <a:p>
+            <a:pPr algn="l">
+              <a:lnSpc>
+                <a:spcPct val="145000"/>
+              </a:lnSpc>
+            </a:pPr>
+            <a:r>
+              <a:rPr sz="1350" b="0">
+                <a:solidFill>
+                  <a:srgbClr val="1C2A33"/>
+                </a:solidFill>
+                <a:latin typeface="楷体"/>
+                <a:ea typeface="楷体"/>
+                <a:cs typeface="楷体"/>
+              </a:rPr>
+              <a:t>能清晰分享本组一项成果（风物志/报告/倡议），做到有条理、有重点。</a:t>
+            </a:r>
+          </a:p>
+        </p:txBody>
+      </p:sp>
+      <p:sp>
+        <p:nvSpPr>
+          <p:cNvPr id="9" name="Rounded Rectangle 8"/>
           <p:cNvSpPr/>
           <p:nvPr/>
         </p:nvSpPr>
         <p:spPr>
           <a:xfrm>
-            <a:off x="804672" y="1581912"/>
-            <a:ext cx="457200" cy="457200"/>
-          </a:xfrm>
-          <a:prstGeom prst="ellipse">
+            <a:off x="6278727" y="1965960"/>
+            <a:ext cx="5272887" cy="1965960"/>
+          </a:xfrm>
+          <a:prstGeom prst="roundRect">
             <a:avLst/>
           </a:prstGeom>
           <a:solidFill>
-            <a:srgbClr val="B23A2A"/>
+            <a:srgbClr val="FFFFFF"/>
           </a:solidFill>
-          <a:ln>
-            <a:noFill/>
+          <a:ln w="20320">
+            <a:solidFill>
+              <a:srgbClr val="2E7D6B"/>
+            </a:solidFill>
           </a:ln>
           <a:effectLst/>
         </p:spPr>
@@ -3660,14 +3818,14 @@
       </p:sp>
       <p:sp>
         <p:nvSpPr>
-          <p:cNvPr id="7" name="TextBox 6"/>
+          <p:cNvPr id="10" name="TextBox 9"/>
           <p:cNvSpPr txBox="1"/>
           <p:nvPr/>
         </p:nvSpPr>
         <p:spPr>
           <a:xfrm>
-            <a:off x="804672" y="1636776"/>
-            <a:ext cx="457200" cy="384048"/>
+            <a:off x="6553047" y="2167128"/>
+            <a:ext cx="4724247" cy="457200"/>
           </a:xfrm>
           <a:prstGeom prst="rect">
             <a:avLst/>
@@ -3680,31 +3838,31 @@
           </a:bodyPr>
           <a:lstStyle/>
           <a:p>
-            <a:pPr algn="ctr"/>
-            <a:r>
-              <a:rPr sz="1600" b="1">
-                <a:solidFill>
-                  <a:srgbClr val="FFFFFF"/>
+            <a:pPr algn="l"/>
+            <a:r>
+              <a:rPr sz="1800" b="1">
+                <a:solidFill>
+                  <a:srgbClr val="2E7D6B"/>
                 </a:solidFill>
                 <a:latin typeface="微软雅黑"/>
                 <a:ea typeface="微软雅黑"/>
                 <a:cs typeface="微软雅黑"/>
               </a:rPr>
-              <a:t>1</a:t>
-            </a:r>
-          </a:p>
-        </p:txBody>
-      </p:sp>
-      <p:sp>
-        <p:nvSpPr>
-          <p:cNvPr id="8" name="TextBox 7"/>
+              <a:t>文化意识</a:t>
+            </a:r>
+          </a:p>
+        </p:txBody>
+      </p:sp>
+      <p:sp>
+        <p:nvSpPr>
+          <p:cNvPr id="11" name="TextBox 10"/>
           <p:cNvSpPr txBox="1"/>
           <p:nvPr/>
         </p:nvSpPr>
         <p:spPr>
           <a:xfrm>
-            <a:off x="1371600" y="1527048"/>
-            <a:ext cx="4434840" cy="457200"/>
+            <a:off x="6553047" y="2743200"/>
+            <a:ext cx="4724247" cy="1005840"/>
           </a:xfrm>
           <a:prstGeom prst="rect">
             <a:avLst/>
@@ -3719,52 +3877,11 @@
           <a:p>
             <a:pPr algn="l">
               <a:lnSpc>
-                <a:spcPct val="110000"/>
+                <a:spcPct val="145000"/>
               </a:lnSpc>
             </a:pPr>
             <a:r>
-              <a:rPr sz="1600" b="1">
-                <a:solidFill>
-                  <a:srgbClr val="1C2A33"/>
-                </a:solidFill>
-                <a:latin typeface="微软雅黑"/>
-                <a:ea typeface="微软雅黑"/>
-                <a:cs typeface="微软雅黑"/>
-              </a:rPr>
-              <a:t>目标</a:t>
-            </a:r>
-          </a:p>
-        </p:txBody>
-      </p:sp>
-      <p:sp>
-        <p:nvSpPr>
-          <p:cNvPr id="9" name="TextBox 8"/>
-          <p:cNvSpPr txBox="1"/>
-          <p:nvPr/>
-        </p:nvSpPr>
-        <p:spPr>
-          <a:xfrm>
-            <a:off x="1371600" y="1965960"/>
-            <a:ext cx="4434840" cy="1417320"/>
-          </a:xfrm>
-          <a:prstGeom prst="rect">
-            <a:avLst/>
-          </a:prstGeom>
-          <a:noFill/>
-        </p:spPr>
-        <p:txBody>
-          <a:bodyPr wrap="square" anchor="t" lIns="0" rIns="0" tIns="0" bIns="0">
-            <a:spAutoFit/>
-          </a:bodyPr>
-          <a:lstStyle/>
-          <a:p>
-            <a:pPr algn="l">
-              <a:lnSpc>
-                <a:spcPct val="128000"/>
-              </a:lnSpc>
-            </a:pPr>
-            <a:r>
-              <a:rPr sz="1400" b="0">
+              <a:rPr sz="1350" b="0">
                 <a:solidFill>
                   <a:srgbClr val="1C2A33"/>
                 </a:solidFill>
@@ -3772,21 +3889,21 @@
                 <a:ea typeface="楷体"/>
                 <a:cs typeface="楷体"/>
               </a:rPr>
-              <a:t>语言能力：能清晰分享本组一项成果（风物志/报告/倡议），做到有条理、有重点。</a:t>
-            </a:r>
-          </a:p>
-        </p:txBody>
-      </p:sp>
-      <p:sp>
-        <p:nvSpPr>
-          <p:cNvPr id="10" name="Rounded Rectangle 9"/>
+              <a:t>在分享中感受家乡文化的丰富与可参与性，强化文化主人翁意识。</a:t>
+            </a:r>
+          </a:p>
+        </p:txBody>
+      </p:sp>
+      <p:sp>
+        <p:nvSpPr>
+          <p:cNvPr id="12" name="Rounded Rectangle 11"/>
           <p:cNvSpPr/>
           <p:nvPr/>
         </p:nvSpPr>
         <p:spPr>
           <a:xfrm>
-            <a:off x="6263640" y="1417320"/>
-            <a:ext cx="5349240" cy="2057400"/>
+            <a:off x="640080" y="4206240"/>
+            <a:ext cx="5272887" cy="1965960"/>
           </a:xfrm>
           <a:prstGeom prst="roundRect">
             <a:avLst/>
@@ -3794,9 +3911,9 @@
           <a:solidFill>
             <a:srgbClr val="FFFFFF"/>
           </a:solidFill>
-          <a:ln w="22860">
+          <a:ln w="20320">
             <a:solidFill>
-              <a:srgbClr val="B23A2A"/>
+              <a:srgbClr val="C8A86B"/>
             </a:solidFill>
           </a:ln>
           <a:effectLst/>
@@ -3825,23 +3942,103 @@
       </p:sp>
       <p:sp>
         <p:nvSpPr>
-          <p:cNvPr id="11" name="Oval 10"/>
+          <p:cNvPr id="13" name="TextBox 12"/>
+          <p:cNvSpPr txBox="1"/>
+          <p:nvPr/>
+        </p:nvSpPr>
+        <p:spPr>
+          <a:xfrm>
+            <a:off x="914400" y="4407408"/>
+            <a:ext cx="4724247" cy="457200"/>
+          </a:xfrm>
+          <a:prstGeom prst="rect">
+            <a:avLst/>
+          </a:prstGeom>
+          <a:noFill/>
+        </p:spPr>
+        <p:txBody>
+          <a:bodyPr wrap="square" anchor="t" lIns="0" rIns="0" tIns="0" bIns="0">
+            <a:spAutoFit/>
+          </a:bodyPr>
+          <a:lstStyle/>
+          <a:p>
+            <a:pPr algn="l"/>
+            <a:r>
+              <a:rPr sz="1800" b="1">
+                <a:solidFill>
+                  <a:srgbClr val="C8A86B"/>
+                </a:solidFill>
+                <a:latin typeface="微软雅黑"/>
+                <a:ea typeface="微软雅黑"/>
+                <a:cs typeface="微软雅黑"/>
+              </a:rPr>
+              <a:t>思维品质</a:t>
+            </a:r>
+          </a:p>
+        </p:txBody>
+      </p:sp>
+      <p:sp>
+        <p:nvSpPr>
+          <p:cNvPr id="14" name="TextBox 13"/>
+          <p:cNvSpPr txBox="1"/>
+          <p:nvPr/>
+        </p:nvSpPr>
+        <p:spPr>
+          <a:xfrm>
+            <a:off x="914400" y="4983480"/>
+            <a:ext cx="4724247" cy="1005840"/>
+          </a:xfrm>
+          <a:prstGeom prst="rect">
+            <a:avLst/>
+          </a:prstGeom>
+          <a:noFill/>
+        </p:spPr>
+        <p:txBody>
+          <a:bodyPr wrap="square" anchor="t" lIns="0" rIns="0" tIns="0" bIns="0">
+            <a:spAutoFit/>
+          </a:bodyPr>
+          <a:lstStyle/>
+          <a:p>
+            <a:pPr algn="l">
+              <a:lnSpc>
+                <a:spcPct val="145000"/>
+              </a:lnSpc>
+            </a:pPr>
+            <a:r>
+              <a:rPr sz="1350" b="0">
+                <a:solidFill>
+                  <a:srgbClr val="1C2A33"/>
+                </a:solidFill>
+                <a:latin typeface="楷体"/>
+                <a:ea typeface="楷体"/>
+                <a:cs typeface="楷体"/>
+              </a:rPr>
+              <a:t>填单元反思单，梳理「调查—撰写—倡议」路径，培养元认知。</a:t>
+            </a:r>
+          </a:p>
+        </p:txBody>
+      </p:sp>
+      <p:sp>
+        <p:nvSpPr>
+          <p:cNvPr id="15" name="Rounded Rectangle 14"/>
           <p:cNvSpPr/>
           <p:nvPr/>
         </p:nvSpPr>
         <p:spPr>
           <a:xfrm>
-            <a:off x="6428232" y="1581912"/>
-            <a:ext cx="457200" cy="457200"/>
-          </a:xfrm>
-          <a:prstGeom prst="ellipse">
+            <a:off x="6278727" y="4206240"/>
+            <a:ext cx="5272887" cy="1965960"/>
+          </a:xfrm>
+          <a:prstGeom prst="roundRect">
             <a:avLst/>
           </a:prstGeom>
           <a:solidFill>
-            <a:srgbClr val="B23A2A"/>
+            <a:srgbClr val="FFFFFF"/>
           </a:solidFill>
-          <a:ln>
-            <a:noFill/>
+          <a:ln w="20320">
+            <a:solidFill>
+              <a:srgbClr val="6B6258"/>
+            </a:solidFill>
           </a:ln>
           <a:effectLst/>
         </p:spPr>
@@ -3869,14 +4066,14 @@
       </p:sp>
       <p:sp>
         <p:nvSpPr>
-          <p:cNvPr id="12" name="TextBox 11"/>
+          <p:cNvPr id="16" name="TextBox 15"/>
           <p:cNvSpPr txBox="1"/>
           <p:nvPr/>
         </p:nvSpPr>
         <p:spPr>
           <a:xfrm>
-            <a:off x="6428232" y="1636776"/>
-            <a:ext cx="457200" cy="384048"/>
+            <a:off x="6553047" y="4407408"/>
+            <a:ext cx="4724247" cy="457200"/>
           </a:xfrm>
           <a:prstGeom prst="rect">
             <a:avLst/>
@@ -3889,31 +4086,31 @@
           </a:bodyPr>
           <a:lstStyle/>
           <a:p>
-            <a:pPr algn="ctr"/>
-            <a:r>
-              <a:rPr sz="1600" b="1">
-                <a:solidFill>
-                  <a:srgbClr val="FFFFFF"/>
+            <a:pPr algn="l"/>
+            <a:r>
+              <a:rPr sz="1800" b="1">
+                <a:solidFill>
+                  <a:srgbClr val="6B6258"/>
                 </a:solidFill>
                 <a:latin typeface="微软雅黑"/>
                 <a:ea typeface="微软雅黑"/>
                 <a:cs typeface="微软雅黑"/>
               </a:rPr>
-              <a:t>2</a:t>
-            </a:r>
-          </a:p>
-        </p:txBody>
-      </p:sp>
-      <p:sp>
-        <p:nvSpPr>
-          <p:cNvPr id="13" name="TextBox 12"/>
+              <a:t>学习能力</a:t>
+            </a:r>
+          </a:p>
+        </p:txBody>
+      </p:sp>
+      <p:sp>
+        <p:nvSpPr>
+          <p:cNvPr id="17" name="TextBox 16"/>
           <p:cNvSpPr txBox="1"/>
           <p:nvPr/>
         </p:nvSpPr>
         <p:spPr>
           <a:xfrm>
-            <a:off x="6995160" y="1527048"/>
-            <a:ext cx="4434840" cy="457200"/>
+            <a:off x="6553047" y="4983480"/>
+            <a:ext cx="4724247" cy="1005840"/>
           </a:xfrm>
           <a:prstGeom prst="rect">
             <a:avLst/>
@@ -3928,52 +4125,11 @@
           <a:p>
             <a:pPr algn="l">
               <a:lnSpc>
-                <a:spcPct val="110000"/>
+                <a:spcPct val="145000"/>
               </a:lnSpc>
             </a:pPr>
             <a:r>
-              <a:rPr sz="1600" b="1">
-                <a:solidFill>
-                  <a:srgbClr val="1C2A33"/>
-                </a:solidFill>
-                <a:latin typeface="微软雅黑"/>
-                <a:ea typeface="微软雅黑"/>
-                <a:cs typeface="微软雅黑"/>
-              </a:rPr>
-              <a:t>目标</a:t>
-            </a:r>
-          </a:p>
-        </p:txBody>
-      </p:sp>
-      <p:sp>
-        <p:nvSpPr>
-          <p:cNvPr id="14" name="TextBox 13"/>
-          <p:cNvSpPr txBox="1"/>
-          <p:nvPr/>
-        </p:nvSpPr>
-        <p:spPr>
-          <a:xfrm>
-            <a:off x="6995160" y="1965960"/>
-            <a:ext cx="4434840" cy="1417320"/>
-          </a:xfrm>
-          <a:prstGeom prst="rect">
-            <a:avLst/>
-          </a:prstGeom>
-          <a:noFill/>
-        </p:spPr>
-        <p:txBody>
-          <a:bodyPr wrap="square" anchor="t" lIns="0" rIns="0" tIns="0" bIns="0">
-            <a:spAutoFit/>
-          </a:bodyPr>
-          <a:lstStyle/>
-          <a:p>
-            <a:pPr algn="l">
-              <a:lnSpc>
-                <a:spcPct val="128000"/>
-              </a:lnSpc>
-            </a:pPr>
-            <a:r>
-              <a:rPr sz="1400" b="0">
+              <a:rPr sz="1350" b="0">
                 <a:solidFill>
                   <a:srgbClr val="1C2A33"/>
                 </a:solidFill>
@@ -3981,134 +4137,7 @@
                 <a:ea typeface="楷体"/>
                 <a:cs typeface="楷体"/>
               </a:rPr>
-              <a:t>文化意识：在分享中感受家乡文化的丰富与可参与性，强化文化主人翁意识。</a:t>
-            </a:r>
-          </a:p>
-        </p:txBody>
-      </p:sp>
-      <p:sp>
-        <p:nvSpPr>
-          <p:cNvPr id="15" name="Rounded Rectangle 14"/>
-          <p:cNvSpPr/>
-          <p:nvPr/>
-        </p:nvSpPr>
-        <p:spPr>
-          <a:xfrm>
-            <a:off x="640080" y="3703320"/>
-            <a:ext cx="5349240" cy="2057400"/>
-          </a:xfrm>
-          <a:prstGeom prst="roundRect">
-            <a:avLst/>
-          </a:prstGeom>
-          <a:solidFill>
-            <a:srgbClr val="FFFFFF"/>
-          </a:solidFill>
-          <a:ln w="22860">
-            <a:solidFill>
-              <a:srgbClr val="B23A2A"/>
-            </a:solidFill>
-          </a:ln>
-          <a:effectLst/>
-        </p:spPr>
-        <p:style>
-          <a:lnRef idx="1">
-            <a:schemeClr val="accent1"/>
-          </a:lnRef>
-          <a:fillRef idx="3">
-            <a:schemeClr val="accent1"/>
-          </a:fillRef>
-          <a:effectRef idx="2">
-            <a:schemeClr val="accent1"/>
-          </a:effectRef>
-          <a:fontRef idx="minor">
-            <a:schemeClr val="lt1"/>
-          </a:fontRef>
-        </p:style>
-        <p:txBody>
-          <a:bodyPr rtlCol="0" anchor="ctr"/>
-          <a:lstStyle/>
-          <a:p>
-            <a:pPr algn="ctr"/>
-          </a:p>
-        </p:txBody>
-      </p:sp>
-      <p:sp>
-        <p:nvSpPr>
-          <p:cNvPr id="16" name="Oval 15"/>
-          <p:cNvSpPr/>
-          <p:nvPr/>
-        </p:nvSpPr>
-        <p:spPr>
-          <a:xfrm>
-            <a:off x="804672" y="3867912"/>
-            <a:ext cx="457200" cy="457200"/>
-          </a:xfrm>
-          <a:prstGeom prst="ellipse">
-            <a:avLst/>
-          </a:prstGeom>
-          <a:solidFill>
-            <a:srgbClr val="B23A2A"/>
-          </a:solidFill>
-          <a:ln>
-            <a:noFill/>
-          </a:ln>
-          <a:effectLst/>
-        </p:spPr>
-        <p:style>
-          <a:lnRef idx="1">
-            <a:schemeClr val="accent1"/>
-          </a:lnRef>
-          <a:fillRef idx="3">
-            <a:schemeClr val="accent1"/>
-          </a:fillRef>
-          <a:effectRef idx="2">
-            <a:schemeClr val="accent1"/>
-          </a:effectRef>
-          <a:fontRef idx="minor">
-            <a:schemeClr val="lt1"/>
-          </a:fontRef>
-        </p:style>
-        <p:txBody>
-          <a:bodyPr rtlCol="0" anchor="ctr"/>
-          <a:lstStyle/>
-          <a:p>
-            <a:pPr algn="ctr"/>
-          </a:p>
-        </p:txBody>
-      </p:sp>
-      <p:sp>
-        <p:nvSpPr>
-          <p:cNvPr id="17" name="TextBox 16"/>
-          <p:cNvSpPr txBox="1"/>
-          <p:nvPr/>
-        </p:nvSpPr>
-        <p:spPr>
-          <a:xfrm>
-            <a:off x="804672" y="3922776"/>
-            <a:ext cx="457200" cy="384048"/>
-          </a:xfrm>
-          <a:prstGeom prst="rect">
-            <a:avLst/>
-          </a:prstGeom>
-          <a:noFill/>
-        </p:spPr>
-        <p:txBody>
-          <a:bodyPr wrap="square" anchor="t" lIns="0" rIns="0" tIns="0" bIns="0">
-            <a:spAutoFit/>
-          </a:bodyPr>
-          <a:lstStyle/>
-          <a:p>
-            <a:pPr algn="ctr"/>
-            <a:r>
-              <a:rPr sz="1600" b="1">
-                <a:solidFill>
-                  <a:srgbClr val="FFFFFF"/>
-                </a:solidFill>
-                <a:latin typeface="微软雅黑"/>
-                <a:ea typeface="微软雅黑"/>
-                <a:cs typeface="微软雅黑"/>
-              </a:rPr>
-              <a:t>3</a:t>
+              <a:t>整合三类实践成果为单元学习产出。</a:t>
             </a:r>
           </a:p>
         </p:txBody>
@@ -4116,297 +4145,6 @@
       <p:sp>
         <p:nvSpPr>
           <p:cNvPr id="18" name="TextBox 17"/>
-          <p:cNvSpPr txBox="1"/>
-          <p:nvPr/>
-        </p:nvSpPr>
-        <p:spPr>
-          <a:xfrm>
-            <a:off x="1371600" y="3813048"/>
-            <a:ext cx="4434840" cy="457200"/>
-          </a:xfrm>
-          <a:prstGeom prst="rect">
-            <a:avLst/>
-          </a:prstGeom>
-          <a:noFill/>
-        </p:spPr>
-        <p:txBody>
-          <a:bodyPr wrap="square" anchor="t" lIns="0" rIns="0" tIns="0" bIns="0">
-            <a:spAutoFit/>
-          </a:bodyPr>
-          <a:lstStyle/>
-          <a:p>
-            <a:pPr algn="l">
-              <a:lnSpc>
-                <a:spcPct val="110000"/>
-              </a:lnSpc>
-            </a:pPr>
-            <a:r>
-              <a:rPr sz="1600" b="1">
-                <a:solidFill>
-                  <a:srgbClr val="1C2A33"/>
-                </a:solidFill>
-                <a:latin typeface="微软雅黑"/>
-                <a:ea typeface="微软雅黑"/>
-                <a:cs typeface="微软雅黑"/>
-              </a:rPr>
-              <a:t>目标</a:t>
-            </a:r>
-          </a:p>
-        </p:txBody>
-      </p:sp>
-      <p:sp>
-        <p:nvSpPr>
-          <p:cNvPr id="19" name="TextBox 18"/>
-          <p:cNvSpPr txBox="1"/>
-          <p:nvPr/>
-        </p:nvSpPr>
-        <p:spPr>
-          <a:xfrm>
-            <a:off x="1371600" y="4251960"/>
-            <a:ext cx="4434840" cy="1417320"/>
-          </a:xfrm>
-          <a:prstGeom prst="rect">
-            <a:avLst/>
-          </a:prstGeom>
-          <a:noFill/>
-        </p:spPr>
-        <p:txBody>
-          <a:bodyPr wrap="square" anchor="t" lIns="0" rIns="0" tIns="0" bIns="0">
-            <a:spAutoFit/>
-          </a:bodyPr>
-          <a:lstStyle/>
-          <a:p>
-            <a:pPr algn="l">
-              <a:lnSpc>
-                <a:spcPct val="128000"/>
-              </a:lnSpc>
-            </a:pPr>
-            <a:r>
-              <a:rPr sz="1400" b="0">
-                <a:solidFill>
-                  <a:srgbClr val="1C2A33"/>
-                </a:solidFill>
-                <a:latin typeface="楷体"/>
-                <a:ea typeface="楷体"/>
-                <a:cs typeface="楷体"/>
-              </a:rPr>
-              <a:t>思维品质：填单元反思单，梳理「调查—撰写—倡议」路径，培养元认知。</a:t>
-            </a:r>
-          </a:p>
-        </p:txBody>
-      </p:sp>
-      <p:sp>
-        <p:nvSpPr>
-          <p:cNvPr id="20" name="Rounded Rectangle 19"/>
-          <p:cNvSpPr/>
-          <p:nvPr/>
-        </p:nvSpPr>
-        <p:spPr>
-          <a:xfrm>
-            <a:off x="6263640" y="3703320"/>
-            <a:ext cx="5349240" cy="2057400"/>
-          </a:xfrm>
-          <a:prstGeom prst="roundRect">
-            <a:avLst/>
-          </a:prstGeom>
-          <a:solidFill>
-            <a:srgbClr val="FFFFFF"/>
-          </a:solidFill>
-          <a:ln w="22860">
-            <a:solidFill>
-              <a:srgbClr val="B23A2A"/>
-            </a:solidFill>
-          </a:ln>
-          <a:effectLst/>
-        </p:spPr>
-        <p:style>
-          <a:lnRef idx="1">
-            <a:schemeClr val="accent1"/>
-          </a:lnRef>
-          <a:fillRef idx="3">
-            <a:schemeClr val="accent1"/>
-          </a:fillRef>
-          <a:effectRef idx="2">
-            <a:schemeClr val="accent1"/>
-          </a:effectRef>
-          <a:fontRef idx="minor">
-            <a:schemeClr val="lt1"/>
-          </a:fontRef>
-        </p:style>
-        <p:txBody>
-          <a:bodyPr rtlCol="0" anchor="ctr"/>
-          <a:lstStyle/>
-          <a:p>
-            <a:pPr algn="ctr"/>
-          </a:p>
-        </p:txBody>
-      </p:sp>
-      <p:sp>
-        <p:nvSpPr>
-          <p:cNvPr id="21" name="Oval 20"/>
-          <p:cNvSpPr/>
-          <p:nvPr/>
-        </p:nvSpPr>
-        <p:spPr>
-          <a:xfrm>
-            <a:off x="6428232" y="3867912"/>
-            <a:ext cx="457200" cy="457200"/>
-          </a:xfrm>
-          <a:prstGeom prst="ellipse">
-            <a:avLst/>
-          </a:prstGeom>
-          <a:solidFill>
-            <a:srgbClr val="B23A2A"/>
-          </a:solidFill>
-          <a:ln>
-            <a:noFill/>
-          </a:ln>
-          <a:effectLst/>
-        </p:spPr>
-        <p:style>
-          <a:lnRef idx="1">
-            <a:schemeClr val="accent1"/>
-          </a:lnRef>
-          <a:fillRef idx="3">
-            <a:schemeClr val="accent1"/>
-          </a:fillRef>
-          <a:effectRef idx="2">
-            <a:schemeClr val="accent1"/>
-          </a:effectRef>
-          <a:fontRef idx="minor">
-            <a:schemeClr val="lt1"/>
-          </a:fontRef>
-        </p:style>
-        <p:txBody>
-          <a:bodyPr rtlCol="0" anchor="ctr"/>
-          <a:lstStyle/>
-          <a:p>
-            <a:pPr algn="ctr"/>
-          </a:p>
-        </p:txBody>
-      </p:sp>
-      <p:sp>
-        <p:nvSpPr>
-          <p:cNvPr id="22" name="TextBox 21"/>
-          <p:cNvSpPr txBox="1"/>
-          <p:nvPr/>
-        </p:nvSpPr>
-        <p:spPr>
-          <a:xfrm>
-            <a:off x="6428232" y="3922776"/>
-            <a:ext cx="457200" cy="384048"/>
-          </a:xfrm>
-          <a:prstGeom prst="rect">
-            <a:avLst/>
-          </a:prstGeom>
-          <a:noFill/>
-        </p:spPr>
-        <p:txBody>
-          <a:bodyPr wrap="square" anchor="t" lIns="0" rIns="0" tIns="0" bIns="0">
-            <a:spAutoFit/>
-          </a:bodyPr>
-          <a:lstStyle/>
-          <a:p>
-            <a:pPr algn="ctr"/>
-            <a:r>
-              <a:rPr sz="1600" b="1">
-                <a:solidFill>
-                  <a:srgbClr val="FFFFFF"/>
-                </a:solidFill>
-                <a:latin typeface="微软雅黑"/>
-                <a:ea typeface="微软雅黑"/>
-                <a:cs typeface="微软雅黑"/>
-              </a:rPr>
-              <a:t>4</a:t>
-            </a:r>
-          </a:p>
-        </p:txBody>
-      </p:sp>
-      <p:sp>
-        <p:nvSpPr>
-          <p:cNvPr id="23" name="TextBox 22"/>
-          <p:cNvSpPr txBox="1"/>
-          <p:nvPr/>
-        </p:nvSpPr>
-        <p:spPr>
-          <a:xfrm>
-            <a:off x="6995160" y="3813048"/>
-            <a:ext cx="4434840" cy="457200"/>
-          </a:xfrm>
-          <a:prstGeom prst="rect">
-            <a:avLst/>
-          </a:prstGeom>
-          <a:noFill/>
-        </p:spPr>
-        <p:txBody>
-          <a:bodyPr wrap="square" anchor="t" lIns="0" rIns="0" tIns="0" bIns="0">
-            <a:spAutoFit/>
-          </a:bodyPr>
-          <a:lstStyle/>
-          <a:p>
-            <a:pPr algn="l">
-              <a:lnSpc>
-                <a:spcPct val="110000"/>
-              </a:lnSpc>
-            </a:pPr>
-            <a:r>
-              <a:rPr sz="1600" b="1">
-                <a:solidFill>
-                  <a:srgbClr val="1C2A33"/>
-                </a:solidFill>
-                <a:latin typeface="微软雅黑"/>
-                <a:ea typeface="微软雅黑"/>
-                <a:cs typeface="微软雅黑"/>
-              </a:rPr>
-              <a:t>目标</a:t>
-            </a:r>
-          </a:p>
-        </p:txBody>
-      </p:sp>
-      <p:sp>
-        <p:nvSpPr>
-          <p:cNvPr id="24" name="TextBox 23"/>
-          <p:cNvSpPr txBox="1"/>
-          <p:nvPr/>
-        </p:nvSpPr>
-        <p:spPr>
-          <a:xfrm>
-            <a:off x="6995160" y="4251960"/>
-            <a:ext cx="4434840" cy="1417320"/>
-          </a:xfrm>
-          <a:prstGeom prst="rect">
-            <a:avLst/>
-          </a:prstGeom>
-          <a:noFill/>
-        </p:spPr>
-        <p:txBody>
-          <a:bodyPr wrap="square" anchor="t" lIns="0" rIns="0" tIns="0" bIns="0">
-            <a:spAutoFit/>
-          </a:bodyPr>
-          <a:lstStyle/>
-          <a:p>
-            <a:pPr algn="l">
-              <a:lnSpc>
-                <a:spcPct val="128000"/>
-              </a:lnSpc>
-            </a:pPr>
-            <a:r>
-              <a:rPr sz="1400" b="0">
-                <a:solidFill>
-                  <a:srgbClr val="1C2A33"/>
-                </a:solidFill>
-                <a:latin typeface="楷体"/>
-                <a:ea typeface="楷体"/>
-                <a:cs typeface="楷体"/>
-              </a:rPr>
-              <a:t>学习能力：整合三类实践成果为单元学习产出。</a:t>
-            </a:r>
-          </a:p>
-        </p:txBody>
-      </p:sp>
-      <p:sp>
-        <p:nvSpPr>
-          <p:cNvPr id="25" name="TextBox 24"/>
           <p:cNvSpPr txBox="1"/>
           <p:nvPr/>
         </p:nvSpPr>
@@ -4533,13 +4271,13 @@
             <a:r>
               <a:rPr sz="1300" b="1">
                 <a:solidFill>
-                  <a:srgbClr val="2E7D6B"/>
+                  <a:srgbClr val="B23A2A"/>
                 </a:solidFill>
                 <a:latin typeface="微软雅黑"/>
                 <a:ea typeface="微软雅黑"/>
                 <a:cs typeface="微软雅黑"/>
               </a:rPr>
-              <a:t>课文背景</a:t>
+              <a:t>背景 · 权威调研</a:t>
             </a:r>
           </a:p>
         </p:txBody>
@@ -4559,7 +4297,7 @@
             <a:avLst/>
           </a:prstGeom>
           <a:solidFill>
-            <a:srgbClr val="2E7D6B"/>
+            <a:srgbClr val="B23A2A"/>
           </a:solidFill>
           <a:ln>
             <a:noFill/>
@@ -4596,8 +4334,8 @@
         </p:nvSpPr>
         <p:spPr>
           <a:xfrm>
-            <a:off x="640080" y="1508760"/>
-            <a:ext cx="6766560" cy="4572000"/>
+            <a:off x="640080" y="1280160"/>
+            <a:ext cx="10058400" cy="548640"/>
           </a:xfrm>
           <a:prstGeom prst="rect">
             <a:avLst/>
@@ -4610,93 +4348,245 @@
           </a:bodyPr>
           <a:lstStyle/>
           <a:p>
+            <a:pPr algn="l"/>
+            <a:r>
+              <a:rPr sz="2800" b="1">
+                <a:solidFill>
+                  <a:srgbClr val="1C2A33"/>
+                </a:solidFill>
+                <a:latin typeface="楷体"/>
+                <a:ea typeface="楷体"/>
+                <a:cs typeface="楷体"/>
+              </a:rPr>
+              <a:t>从教材到课堂</a:t>
+            </a:r>
+          </a:p>
+        </p:txBody>
+      </p:sp>
+      <p:sp>
+        <p:nvSpPr>
+          <p:cNvPr id="6" name="TextBox 5"/>
+          <p:cNvSpPr txBox="1"/>
+          <p:nvPr/>
+        </p:nvSpPr>
+        <p:spPr>
+          <a:xfrm>
+            <a:off x="640080" y="1874520"/>
+            <a:ext cx="5227167" cy="4297680"/>
+          </a:xfrm>
+          <a:prstGeom prst="rect">
+            <a:avLst/>
+          </a:prstGeom>
+          <a:noFill/>
+        </p:spPr>
+        <p:txBody>
+          <a:bodyPr wrap="square" anchor="t" lIns="0" rIns="0" tIns="0" bIns="0">
+            <a:spAutoFit/>
+          </a:bodyPr>
+          <a:lstStyle/>
+          <a:p>
             <a:pPr algn="l">
               <a:lnSpc>
-                <a:spcPct val="150000"/>
+                <a:spcPct val="155000"/>
+              </a:lnSpc>
+            </a:pPr>
+            <a:r>
+              <a:rPr sz="1400" b="0">
+                <a:solidFill>
+                  <a:srgbClr val="1C2A33"/>
+                </a:solidFill>
+                <a:latin typeface="楷体"/>
+                <a:ea typeface="楷体"/>
+                <a:cs typeface="楷体"/>
+              </a:rPr>
+              <a:t>本课为第四单元收官，举办「家乡文化」分享会，整合三活动成果：风物志宣读、调查报告分享、倡议书张贴。含三环节：①成果展（卡片墙+倡议书张贴）；②代表分享（每组3分钟）；③单元反思单（回顾「调查—撰写—倡议」路径，体会文化参与）。这是实践单元的总结与元认知课。</a:t>
+            </a:r>
+          </a:p>
+        </p:txBody>
+      </p:sp>
+      <p:sp>
+        <p:nvSpPr>
+          <p:cNvPr id="7" name="Rounded Rectangle 6"/>
+          <p:cNvSpPr/>
+          <p:nvPr/>
+        </p:nvSpPr>
+        <p:spPr>
+          <a:xfrm>
+            <a:off x="6324447" y="1874520"/>
+            <a:ext cx="5227167" cy="2788920"/>
+          </a:xfrm>
+          <a:prstGeom prst="roundRect">
+            <a:avLst/>
+          </a:prstGeom>
+          <a:solidFill>
+            <a:srgbClr val="1C2A33"/>
+          </a:solidFill>
+          <a:effectLst/>
+        </p:spPr>
+        <p:style>
+          <a:lnRef idx="1">
+            <a:schemeClr val="accent1"/>
+          </a:lnRef>
+          <a:fillRef idx="3">
+            <a:schemeClr val="accent1"/>
+          </a:fillRef>
+          <a:effectRef idx="2">
+            <a:schemeClr val="accent1"/>
+          </a:effectRef>
+          <a:fontRef idx="minor">
+            <a:schemeClr val="lt1"/>
+          </a:fontRef>
+        </p:style>
+        <p:txBody>
+          <a:bodyPr rtlCol="0" anchor="ctr"/>
+          <a:lstStyle/>
+          <a:p>
+            <a:pPr algn="ctr"/>
+          </a:p>
+        </p:txBody>
+      </p:sp>
+      <p:sp>
+        <p:nvSpPr>
+          <p:cNvPr id="8" name="TextBox 7"/>
+          <p:cNvSpPr txBox="1"/>
+          <p:nvPr/>
+        </p:nvSpPr>
+        <p:spPr>
+          <a:xfrm>
+            <a:off x="6598767" y="2011680"/>
+            <a:ext cx="4678527" cy="365760"/>
+          </a:xfrm>
+          <a:prstGeom prst="rect">
+            <a:avLst/>
+          </a:prstGeom>
+          <a:noFill/>
+        </p:spPr>
+        <p:txBody>
+          <a:bodyPr wrap="square" anchor="t" lIns="0" rIns="0" tIns="0" bIns="0">
+            <a:spAutoFit/>
+          </a:bodyPr>
+          <a:lstStyle/>
+          <a:p>
+            <a:pPr algn="l"/>
+            <a:r>
+              <a:rPr sz="1600" b="1">
+                <a:solidFill>
+                  <a:srgbClr val="C8A86B"/>
+                </a:solidFill>
+                <a:latin typeface="楷体"/>
+                <a:ea typeface="楷体"/>
+                <a:cs typeface="楷体"/>
+              </a:rPr>
+              <a:t>权威来源</a:t>
+            </a:r>
+          </a:p>
+        </p:txBody>
+      </p:sp>
+      <p:sp>
+        <p:nvSpPr>
+          <p:cNvPr id="9" name="TextBox 8"/>
+          <p:cNvSpPr txBox="1"/>
+          <p:nvPr/>
+        </p:nvSpPr>
+        <p:spPr>
+          <a:xfrm>
+            <a:off x="6598767" y="2468880"/>
+            <a:ext cx="4678527" cy="2011680"/>
+          </a:xfrm>
+          <a:prstGeom prst="rect">
+            <a:avLst/>
+          </a:prstGeom>
+          <a:noFill/>
+        </p:spPr>
+        <p:txBody>
+          <a:bodyPr wrap="square" anchor="t" lIns="0" rIns="0" tIns="0" bIns="0">
+            <a:spAutoFit/>
+          </a:bodyPr>
+          <a:lstStyle/>
+          <a:p>
+            <a:pPr algn="l">
+              <a:lnSpc>
+                <a:spcPct val="140000"/>
               </a:lnSpc>
               <a:spcAft>
                 <a:spcPts val="600"/>
               </a:spcAft>
             </a:pPr>
             <a:r>
-              <a:rPr sz="1600" b="0">
-                <a:solidFill>
-                  <a:srgbClr val="1C2A33"/>
-                </a:solidFill>
-                <a:latin typeface="楷体"/>
-                <a:ea typeface="楷体"/>
-                <a:cs typeface="楷体"/>
-              </a:rPr>
-              <a:t>本课为第四单元收官，举办「家乡文化」分享会，整合三活动成果：风物志宣读、调查报告分享、倡议书张贴。含三环节：①成果展（卡片墙+倡议书张贴）；②代表分享（每组3分钟）；③单元反思单（回顾「调查—撰写—倡议」路径，体会文化参与）。这是实践单元的总结与元认知课。</a:t>
-            </a:r>
-          </a:p>
-        </p:txBody>
-      </p:sp>
-      <p:pic>
-        <p:nvPicPr>
-          <p:cNvPr id="6" name="Picture 5" descr="typewriter.jpg"/>
-          <p:cNvPicPr>
-            <a:picLocks noChangeAspect="1"/>
-          </p:cNvPicPr>
-          <p:nvPr/>
-        </p:nvPicPr>
-        <p:blipFill>
-          <a:blip r:embed="rId2"/>
-          <a:srcRect l="5860" r="5860"/>
-          <a:stretch>
-            <a:fillRect/>
-          </a:stretch>
-        </p:blipFill>
-        <p:spPr>
-          <a:xfrm>
-            <a:off x="8046720" y="1508760"/>
-            <a:ext cx="4114800" cy="3108960"/>
-          </a:xfrm>
-          <a:prstGeom prst="rect">
-            <a:avLst/>
-          </a:prstGeom>
-        </p:spPr>
-      </p:pic>
-      <p:sp>
-        <p:nvSpPr>
-          <p:cNvPr id="7" name="TextBox 6"/>
-          <p:cNvSpPr txBox="1"/>
-          <p:nvPr/>
-        </p:nvSpPr>
-        <p:spPr>
-          <a:xfrm>
-            <a:off x="8046720" y="4663440"/>
-            <a:ext cx="4114800" cy="365760"/>
-          </a:xfrm>
-          <a:prstGeom prst="rect">
-            <a:avLst/>
-          </a:prstGeom>
-          <a:noFill/>
-        </p:spPr>
-        <p:txBody>
-          <a:bodyPr wrap="square" anchor="t" lIns="0" rIns="0" tIns="0" bIns="0">
-            <a:spAutoFit/>
-          </a:bodyPr>
-          <a:lstStyle/>
-          <a:p>
-            <a:pPr algn="ctr"/>
-            <a:r>
-              <a:rPr sz="1100" b="0">
-                <a:solidFill>
-                  <a:srgbClr val="6B6258"/>
+              <a:rPr sz="1200" b="0">
+                <a:solidFill>
+                  <a:srgbClr val="FFFFFF"/>
                 </a:solidFill>
                 <a:latin typeface="微软雅黑"/>
                 <a:ea typeface="微软雅黑"/>
                 <a:cs typeface="微软雅黑"/>
               </a:rPr>
-              <a:t>资料图（自由授权，复用 typewriter.jpg）</a:t>
-            </a:r>
-          </a:p>
-        </p:txBody>
-      </p:sp>
-      <p:sp>
-        <p:nvSpPr>
-          <p:cNvPr id="8" name="TextBox 7"/>
+              <a:t>来源：人教版《语文》必修上册教学参考书（第四单元活动）</a:t>
+            </a:r>
+          </a:p>
+          <a:p>
+            <a:pPr algn="l">
+              <a:lnSpc>
+                <a:spcPct val="140000"/>
+              </a:lnSpc>
+              <a:spcAft>
+                <a:spcPts val="600"/>
+              </a:spcAft>
+            </a:pPr>
+            <a:r>
+              <a:rPr sz="1200" b="0">
+                <a:solidFill>
+                  <a:srgbClr val="FFFFFF"/>
+                </a:solidFill>
+                <a:latin typeface="微软雅黑"/>
+                <a:ea typeface="微软雅黑"/>
+                <a:cs typeface="微软雅黑"/>
+              </a:rPr>
+              <a:t>来源：21世纪教育网《必修上第四单元大单元教学设计》（成果展示）</a:t>
+            </a:r>
+          </a:p>
+        </p:txBody>
+      </p:sp>
+      <p:sp>
+        <p:nvSpPr>
+          <p:cNvPr id="10" name="TextBox 9"/>
+          <p:cNvSpPr txBox="1"/>
+          <p:nvPr/>
+        </p:nvSpPr>
+        <p:spPr>
+          <a:xfrm>
+            <a:off x="6324447" y="4846320"/>
+            <a:ext cx="5227167" cy="457200"/>
+          </a:xfrm>
+          <a:prstGeom prst="rect">
+            <a:avLst/>
+          </a:prstGeom>
+          <a:noFill/>
+        </p:spPr>
+        <p:txBody>
+          <a:bodyPr wrap="square" anchor="t" lIns="0" rIns="0" tIns="0" bIns="0">
+            <a:spAutoFit/>
+          </a:bodyPr>
+          <a:lstStyle/>
+          <a:p>
+            <a:pPr algn="l"/>
+            <a:r>
+              <a:rPr sz="1200" b="0">
+                <a:solidFill>
+                  <a:srgbClr val="6B6258"/>
+                </a:solidFill>
+                <a:latin typeface="微软雅黑"/>
+                <a:ea typeface="微软雅黑"/>
+                <a:cs typeface="微软雅黑"/>
+              </a:rPr>
+              <a:t>本课件未使用无关配图（学科色块兜底）</a:t>
+            </a:r>
+          </a:p>
+        </p:txBody>
+      </p:sp>
+      <p:sp>
+        <p:nvSpPr>
+          <p:cNvPr id="11" name="TextBox 10"/>
           <p:cNvSpPr txBox="1"/>
           <p:nvPr/>
         </p:nvSpPr>
@@ -4829,7 +4719,7 @@
                 <a:ea typeface="微软雅黑"/>
                 <a:cs typeface="微软雅黑"/>
               </a:rPr>
-              <a:t>学习重点</a:t>
+              <a:t>重点</a:t>
             </a:r>
           </a:p>
         </p:txBody>
@@ -4880,14 +4770,51 @@
       </p:sp>
       <p:sp>
         <p:nvSpPr>
-          <p:cNvPr id="5" name="Rounded Rectangle 4"/>
+          <p:cNvPr id="5" name="TextBox 4"/>
+          <p:cNvSpPr txBox="1"/>
+          <p:nvPr/>
+        </p:nvSpPr>
+        <p:spPr>
+          <a:xfrm>
+            <a:off x="640080" y="1280160"/>
+            <a:ext cx="10058400" cy="548640"/>
+          </a:xfrm>
+          <a:prstGeom prst="rect">
+            <a:avLst/>
+          </a:prstGeom>
+          <a:noFill/>
+        </p:spPr>
+        <p:txBody>
+          <a:bodyPr wrap="square" anchor="t" lIns="0" rIns="0" tIns="0" bIns="0">
+            <a:spAutoFit/>
+          </a:bodyPr>
+          <a:lstStyle/>
+          <a:p>
+            <a:pPr algn="l"/>
+            <a:r>
+              <a:rPr sz="2800" b="1">
+                <a:solidFill>
+                  <a:srgbClr val="1C2A33"/>
+                </a:solidFill>
+                <a:latin typeface="楷体"/>
+                <a:ea typeface="楷体"/>
+                <a:cs typeface="楷体"/>
+              </a:rPr>
+              <a:t>本课要点</a:t>
+            </a:r>
+          </a:p>
+        </p:txBody>
+      </p:sp>
+      <p:sp>
+        <p:nvSpPr>
+          <p:cNvPr id="6" name="Rounded Rectangle 5"/>
           <p:cNvSpPr/>
           <p:nvPr/>
         </p:nvSpPr>
         <p:spPr>
           <a:xfrm>
-            <a:off x="640080" y="1371600"/>
-            <a:ext cx="10911535" cy="1597152"/>
+            <a:off x="640080" y="2011680"/>
+            <a:ext cx="3393338" cy="3840480"/>
           </a:xfrm>
           <a:prstGeom prst="roundRect">
             <a:avLst/>
@@ -4895,7 +4822,343 @@
           <a:solidFill>
             <a:srgbClr val="FFFFFF"/>
           </a:solidFill>
-          <a:ln w="22860">
+          <a:ln w="20320">
+            <a:solidFill>
+              <a:srgbClr val="B23A2A"/>
+            </a:solidFill>
+          </a:ln>
+          <a:effectLst/>
+        </p:spPr>
+        <p:style>
+          <a:lnRef idx="1">
+            <a:schemeClr val="accent1"/>
+          </a:lnRef>
+          <a:fillRef idx="3">
+            <a:schemeClr val="accent1"/>
+          </a:fillRef>
+          <a:effectRef idx="2">
+            <a:schemeClr val="accent1"/>
+          </a:effectRef>
+          <a:fontRef idx="minor">
+            <a:schemeClr val="lt1"/>
+          </a:fontRef>
+        </p:style>
+        <p:txBody>
+          <a:bodyPr rtlCol="0" anchor="ctr"/>
+          <a:lstStyle/>
+          <a:p>
+            <a:pPr algn="ctr"/>
+          </a:p>
+        </p:txBody>
+      </p:sp>
+      <p:sp>
+        <p:nvSpPr>
+          <p:cNvPr id="7" name="Rectangle 6"/>
+          <p:cNvSpPr/>
+          <p:nvPr/>
+        </p:nvSpPr>
+        <p:spPr>
+          <a:xfrm>
+            <a:off x="640080" y="2011680"/>
+            <a:ext cx="3393338" cy="548640"/>
+          </a:xfrm>
+          <a:prstGeom prst="rect">
+            <a:avLst/>
+          </a:prstGeom>
+          <a:solidFill>
+            <a:srgbClr val="B23A2A"/>
+          </a:solidFill>
+          <a:ln>
+            <a:noFill/>
+          </a:ln>
+          <a:effectLst/>
+        </p:spPr>
+        <p:style>
+          <a:lnRef idx="1">
+            <a:schemeClr val="accent1"/>
+          </a:lnRef>
+          <a:fillRef idx="3">
+            <a:schemeClr val="accent1"/>
+          </a:fillRef>
+          <a:effectRef idx="2">
+            <a:schemeClr val="accent1"/>
+          </a:effectRef>
+          <a:fontRef idx="minor">
+            <a:schemeClr val="lt1"/>
+          </a:fontRef>
+        </p:style>
+        <p:txBody>
+          <a:bodyPr rtlCol="0" anchor="ctr"/>
+          <a:lstStyle/>
+          <a:p>
+            <a:pPr algn="ctr"/>
+          </a:p>
+        </p:txBody>
+      </p:sp>
+      <p:sp>
+        <p:nvSpPr>
+          <p:cNvPr id="8" name="TextBox 7"/>
+          <p:cNvSpPr txBox="1"/>
+          <p:nvPr/>
+        </p:nvSpPr>
+        <p:spPr>
+          <a:xfrm>
+            <a:off x="640080" y="2103120"/>
+            <a:ext cx="3393338" cy="365760"/>
+          </a:xfrm>
+          <a:prstGeom prst="rect">
+            <a:avLst/>
+          </a:prstGeom>
+          <a:noFill/>
+        </p:spPr>
+        <p:txBody>
+          <a:bodyPr wrap="square" anchor="t" lIns="0" rIns="0" tIns="0" bIns="0">
+            <a:spAutoFit/>
+          </a:bodyPr>
+          <a:lstStyle/>
+          <a:p>
+            <a:pPr algn="ctr"/>
+            <a:r>
+              <a:rPr sz="1500" b="1">
+                <a:solidFill>
+                  <a:srgbClr val="FFFFFF"/>
+                </a:solidFill>
+                <a:latin typeface="微软雅黑"/>
+                <a:ea typeface="微软雅黑"/>
+                <a:cs typeface="微软雅黑"/>
+              </a:rPr>
+              <a:t>要点 1</a:t>
+            </a:r>
+          </a:p>
+        </p:txBody>
+      </p:sp>
+      <p:sp>
+        <p:nvSpPr>
+          <p:cNvPr id="9" name="TextBox 8"/>
+          <p:cNvSpPr txBox="1"/>
+          <p:nvPr/>
+        </p:nvSpPr>
+        <p:spPr>
+          <a:xfrm>
+            <a:off x="914400" y="2743200"/>
+            <a:ext cx="2844698" cy="2926080"/>
+          </a:xfrm>
+          <a:prstGeom prst="rect">
+            <a:avLst/>
+          </a:prstGeom>
+          <a:noFill/>
+        </p:spPr>
+        <p:txBody>
+          <a:bodyPr wrap="square" anchor="t" lIns="0" rIns="0" tIns="0" bIns="0">
+            <a:spAutoFit/>
+          </a:bodyPr>
+          <a:lstStyle/>
+          <a:p>
+            <a:pPr algn="l">
+              <a:lnSpc>
+                <a:spcPct val="150000"/>
+              </a:lnSpc>
+            </a:pPr>
+            <a:r>
+              <a:rPr sz="1400" b="0">
+                <a:solidFill>
+                  <a:srgbClr val="1C2A33"/>
+                </a:solidFill>
+                <a:latin typeface="楷体"/>
+                <a:ea typeface="楷体"/>
+                <a:cs typeface="楷体"/>
+              </a:rPr>
+              <a:t>成果展：风物卡/口述卡贴墙，倡议书张贴。</a:t>
+            </a:r>
+          </a:p>
+        </p:txBody>
+      </p:sp>
+      <p:sp>
+        <p:nvSpPr>
+          <p:cNvPr id="10" name="Rounded Rectangle 9"/>
+          <p:cNvSpPr/>
+          <p:nvPr/>
+        </p:nvSpPr>
+        <p:spPr>
+          <a:xfrm>
+            <a:off x="4399178" y="2011680"/>
+            <a:ext cx="3393338" cy="3840480"/>
+          </a:xfrm>
+          <a:prstGeom prst="roundRect">
+            <a:avLst/>
+          </a:prstGeom>
+          <a:solidFill>
+            <a:srgbClr val="FFFFFF"/>
+          </a:solidFill>
+          <a:ln w="20320">
+            <a:solidFill>
+              <a:srgbClr val="2E7D6B"/>
+            </a:solidFill>
+          </a:ln>
+          <a:effectLst/>
+        </p:spPr>
+        <p:style>
+          <a:lnRef idx="1">
+            <a:schemeClr val="accent1"/>
+          </a:lnRef>
+          <a:fillRef idx="3">
+            <a:schemeClr val="accent1"/>
+          </a:fillRef>
+          <a:effectRef idx="2">
+            <a:schemeClr val="accent1"/>
+          </a:effectRef>
+          <a:fontRef idx="minor">
+            <a:schemeClr val="lt1"/>
+          </a:fontRef>
+        </p:style>
+        <p:txBody>
+          <a:bodyPr rtlCol="0" anchor="ctr"/>
+          <a:lstStyle/>
+          <a:p>
+            <a:pPr algn="ctr"/>
+          </a:p>
+        </p:txBody>
+      </p:sp>
+      <p:sp>
+        <p:nvSpPr>
+          <p:cNvPr id="11" name="Rectangle 10"/>
+          <p:cNvSpPr/>
+          <p:nvPr/>
+        </p:nvSpPr>
+        <p:spPr>
+          <a:xfrm>
+            <a:off x="4399178" y="2011680"/>
+            <a:ext cx="3393338" cy="548640"/>
+          </a:xfrm>
+          <a:prstGeom prst="rect">
+            <a:avLst/>
+          </a:prstGeom>
+          <a:solidFill>
+            <a:srgbClr val="2E7D6B"/>
+          </a:solidFill>
+          <a:ln>
+            <a:noFill/>
+          </a:ln>
+          <a:effectLst/>
+        </p:spPr>
+        <p:style>
+          <a:lnRef idx="1">
+            <a:schemeClr val="accent1"/>
+          </a:lnRef>
+          <a:fillRef idx="3">
+            <a:schemeClr val="accent1"/>
+          </a:fillRef>
+          <a:effectRef idx="2">
+            <a:schemeClr val="accent1"/>
+          </a:effectRef>
+          <a:fontRef idx="minor">
+            <a:schemeClr val="lt1"/>
+          </a:fontRef>
+        </p:style>
+        <p:txBody>
+          <a:bodyPr rtlCol="0" anchor="ctr"/>
+          <a:lstStyle/>
+          <a:p>
+            <a:pPr algn="ctr"/>
+          </a:p>
+        </p:txBody>
+      </p:sp>
+      <p:sp>
+        <p:nvSpPr>
+          <p:cNvPr id="12" name="TextBox 11"/>
+          <p:cNvSpPr txBox="1"/>
+          <p:nvPr/>
+        </p:nvSpPr>
+        <p:spPr>
+          <a:xfrm>
+            <a:off x="4399178" y="2103120"/>
+            <a:ext cx="3393338" cy="365760"/>
+          </a:xfrm>
+          <a:prstGeom prst="rect">
+            <a:avLst/>
+          </a:prstGeom>
+          <a:noFill/>
+        </p:spPr>
+        <p:txBody>
+          <a:bodyPr wrap="square" anchor="t" lIns="0" rIns="0" tIns="0" bIns="0">
+            <a:spAutoFit/>
+          </a:bodyPr>
+          <a:lstStyle/>
+          <a:p>
+            <a:pPr algn="ctr"/>
+            <a:r>
+              <a:rPr sz="1500" b="1">
+                <a:solidFill>
+                  <a:srgbClr val="FFFFFF"/>
+                </a:solidFill>
+                <a:latin typeface="微软雅黑"/>
+                <a:ea typeface="微软雅黑"/>
+                <a:cs typeface="微软雅黑"/>
+              </a:rPr>
+              <a:t>要点 2</a:t>
+            </a:r>
+          </a:p>
+        </p:txBody>
+      </p:sp>
+      <p:sp>
+        <p:nvSpPr>
+          <p:cNvPr id="13" name="TextBox 12"/>
+          <p:cNvSpPr txBox="1"/>
+          <p:nvPr/>
+        </p:nvSpPr>
+        <p:spPr>
+          <a:xfrm>
+            <a:off x="4673498" y="2743200"/>
+            <a:ext cx="2844698" cy="2926080"/>
+          </a:xfrm>
+          <a:prstGeom prst="rect">
+            <a:avLst/>
+          </a:prstGeom>
+          <a:noFill/>
+        </p:spPr>
+        <p:txBody>
+          <a:bodyPr wrap="square" anchor="t" lIns="0" rIns="0" tIns="0" bIns="0">
+            <a:spAutoFit/>
+          </a:bodyPr>
+          <a:lstStyle/>
+          <a:p>
+            <a:pPr algn="l">
+              <a:lnSpc>
+                <a:spcPct val="150000"/>
+              </a:lnSpc>
+            </a:pPr>
+            <a:r>
+              <a:rPr sz="1400" b="0">
+                <a:solidFill>
+                  <a:srgbClr val="1C2A33"/>
+                </a:solidFill>
+                <a:latin typeface="楷体"/>
+                <a:ea typeface="楷体"/>
+                <a:cs typeface="楷体"/>
+              </a:rPr>
+              <a:t>代表分享：每组3分钟，讲清「我们做了什么、发现了什么、倡议什么」。</a:t>
+            </a:r>
+          </a:p>
+        </p:txBody>
+      </p:sp>
+      <p:sp>
+        <p:nvSpPr>
+          <p:cNvPr id="14" name="Rounded Rectangle 13"/>
+          <p:cNvSpPr/>
+          <p:nvPr/>
+        </p:nvSpPr>
+        <p:spPr>
+          <a:xfrm>
+            <a:off x="8158276" y="2011680"/>
+            <a:ext cx="3393338" cy="3840480"/>
+          </a:xfrm>
+          <a:prstGeom prst="roundRect">
+            <a:avLst/>
+          </a:prstGeom>
+          <a:solidFill>
+            <a:srgbClr val="FFFFFF"/>
+          </a:solidFill>
+          <a:ln w="20320">
             <a:solidFill>
               <a:srgbClr val="C8A86B"/>
             </a:solidFill>
@@ -4926,107 +5189,23 @@
       </p:sp>
       <p:sp>
         <p:nvSpPr>
-          <p:cNvPr id="6" name="TextBox 5"/>
-          <p:cNvSpPr txBox="1"/>
-          <p:nvPr/>
-        </p:nvSpPr>
-        <p:spPr>
-          <a:xfrm>
-            <a:off x="1371600" y="1481328"/>
-            <a:ext cx="9997135" cy="457200"/>
-          </a:xfrm>
-          <a:prstGeom prst="rect">
-            <a:avLst/>
-          </a:prstGeom>
-          <a:noFill/>
-        </p:spPr>
-        <p:txBody>
-          <a:bodyPr wrap="square" anchor="t" lIns="0" rIns="0" tIns="0" bIns="0">
-            <a:spAutoFit/>
-          </a:bodyPr>
-          <a:lstStyle/>
-          <a:p>
-            <a:pPr algn="l">
-              <a:lnSpc>
-                <a:spcPct val="110000"/>
-              </a:lnSpc>
-            </a:pPr>
-            <a:r>
-              <a:rPr sz="1600" b="1">
-                <a:solidFill>
-                  <a:srgbClr val="1C2A33"/>
-                </a:solidFill>
-                <a:latin typeface="微软雅黑"/>
-                <a:ea typeface="微软雅黑"/>
-                <a:cs typeface="微软雅黑"/>
-              </a:rPr>
-              <a:t/>
-            </a:r>
-          </a:p>
-        </p:txBody>
-      </p:sp>
-      <p:sp>
-        <p:nvSpPr>
-          <p:cNvPr id="7" name="TextBox 6"/>
-          <p:cNvSpPr txBox="1"/>
-          <p:nvPr/>
-        </p:nvSpPr>
-        <p:spPr>
-          <a:xfrm>
-            <a:off x="1371600" y="1920240"/>
-            <a:ext cx="9997135" cy="957072"/>
-          </a:xfrm>
-          <a:prstGeom prst="rect">
-            <a:avLst/>
-          </a:prstGeom>
-          <a:noFill/>
-        </p:spPr>
-        <p:txBody>
-          <a:bodyPr wrap="square" anchor="t" lIns="0" rIns="0" tIns="0" bIns="0">
-            <a:spAutoFit/>
-          </a:bodyPr>
-          <a:lstStyle/>
-          <a:p>
-            <a:pPr algn="l">
-              <a:lnSpc>
-                <a:spcPct val="128000"/>
-              </a:lnSpc>
-            </a:pPr>
-            <a:r>
-              <a:rPr sz="1300" b="0">
-                <a:solidFill>
-                  <a:srgbClr val="1C2A33"/>
-                </a:solidFill>
-                <a:latin typeface="楷体"/>
-                <a:ea typeface="楷体"/>
-                <a:cs typeface="楷体"/>
-              </a:rPr>
-              <a:t>① 成果展：风物卡/口述卡贴墙，倡议书张贴。</a:t>
-            </a:r>
-          </a:p>
-        </p:txBody>
-      </p:sp>
-      <p:sp>
-        <p:nvSpPr>
-          <p:cNvPr id="8" name="Rounded Rectangle 7"/>
+          <p:cNvPr id="15" name="Rectangle 14"/>
           <p:cNvSpPr/>
           <p:nvPr/>
         </p:nvSpPr>
         <p:spPr>
           <a:xfrm>
-            <a:off x="640080" y="3078480"/>
-            <a:ext cx="10911535" cy="1597152"/>
-          </a:xfrm>
-          <a:prstGeom prst="roundRect">
+            <a:off x="8158276" y="2011680"/>
+            <a:ext cx="3393338" cy="548640"/>
+          </a:xfrm>
+          <a:prstGeom prst="rect">
             <a:avLst/>
           </a:prstGeom>
           <a:solidFill>
-            <a:srgbClr val="FFFFFF"/>
+            <a:srgbClr val="C8A86B"/>
           </a:solidFill>
-          <a:ln w="22860">
-            <a:solidFill>
-              <a:srgbClr val="C8A86B"/>
-            </a:solidFill>
+          <a:ln>
+            <a:noFill/>
           </a:ln>
           <a:effectLst/>
         </p:spPr>
@@ -5054,14 +5233,14 @@
       </p:sp>
       <p:sp>
         <p:nvSpPr>
-          <p:cNvPr id="9" name="TextBox 8"/>
+          <p:cNvPr id="16" name="TextBox 15"/>
           <p:cNvSpPr txBox="1"/>
           <p:nvPr/>
         </p:nvSpPr>
         <p:spPr>
           <a:xfrm>
-            <a:off x="1371600" y="3188208"/>
-            <a:ext cx="9997135" cy="457200"/>
+            <a:off x="8158276" y="2103120"/>
+            <a:ext cx="3393338" cy="365760"/>
           </a:xfrm>
           <a:prstGeom prst="rect">
             <a:avLst/>
@@ -5074,35 +5253,31 @@
           </a:bodyPr>
           <a:lstStyle/>
           <a:p>
-            <a:pPr algn="l">
-              <a:lnSpc>
-                <a:spcPct val="110000"/>
-              </a:lnSpc>
-            </a:pPr>
-            <a:r>
-              <a:rPr sz="1600" b="1">
-                <a:solidFill>
-                  <a:srgbClr val="1C2A33"/>
+            <a:pPr algn="ctr"/>
+            <a:r>
+              <a:rPr sz="1500" b="1">
+                <a:solidFill>
+                  <a:srgbClr val="FFFFFF"/>
                 </a:solidFill>
                 <a:latin typeface="微软雅黑"/>
                 <a:ea typeface="微软雅黑"/>
                 <a:cs typeface="微软雅黑"/>
               </a:rPr>
-              <a:t/>
-            </a:r>
-          </a:p>
-        </p:txBody>
-      </p:sp>
-      <p:sp>
-        <p:nvSpPr>
-          <p:cNvPr id="10" name="TextBox 9"/>
+              <a:t>要点 3</a:t>
+            </a:r>
+          </a:p>
+        </p:txBody>
+      </p:sp>
+      <p:sp>
+        <p:nvSpPr>
+          <p:cNvPr id="17" name="TextBox 16"/>
           <p:cNvSpPr txBox="1"/>
           <p:nvPr/>
         </p:nvSpPr>
         <p:spPr>
           <a:xfrm>
-            <a:off x="1371600" y="3627120"/>
-            <a:ext cx="9997135" cy="957072"/>
+            <a:off x="8432596" y="2743200"/>
+            <a:ext cx="2844698" cy="2926080"/>
           </a:xfrm>
           <a:prstGeom prst="rect">
             <a:avLst/>
@@ -5117,11 +5292,11 @@
           <a:p>
             <a:pPr algn="l">
               <a:lnSpc>
-                <a:spcPct val="128000"/>
+                <a:spcPct val="150000"/>
               </a:lnSpc>
             </a:pPr>
             <a:r>
-              <a:rPr sz="1300" b="0">
+              <a:rPr sz="1400" b="0">
                 <a:solidFill>
                   <a:srgbClr val="1C2A33"/>
                 </a:solidFill>
@@ -5129,142 +5304,14 @@
                 <a:ea typeface="楷体"/>
                 <a:cs typeface="楷体"/>
               </a:rPr>
-              <a:t>② 代表分享：每组3分钟，讲清「我们做了什么、发现了什么、倡议什么」。</a:t>
-            </a:r>
-          </a:p>
-        </p:txBody>
-      </p:sp>
-      <p:sp>
-        <p:nvSpPr>
-          <p:cNvPr id="11" name="Rounded Rectangle 10"/>
-          <p:cNvSpPr/>
-          <p:nvPr/>
-        </p:nvSpPr>
-        <p:spPr>
-          <a:xfrm>
-            <a:off x="640080" y="4785360"/>
-            <a:ext cx="10911535" cy="1597152"/>
-          </a:xfrm>
-          <a:prstGeom prst="roundRect">
-            <a:avLst/>
-          </a:prstGeom>
-          <a:solidFill>
-            <a:srgbClr val="FFFFFF"/>
-          </a:solidFill>
-          <a:ln w="22860">
-            <a:solidFill>
-              <a:srgbClr val="C8A86B"/>
-            </a:solidFill>
-          </a:ln>
-          <a:effectLst/>
-        </p:spPr>
-        <p:style>
-          <a:lnRef idx="1">
-            <a:schemeClr val="accent1"/>
-          </a:lnRef>
-          <a:fillRef idx="3">
-            <a:schemeClr val="accent1"/>
-          </a:fillRef>
-          <a:effectRef idx="2">
-            <a:schemeClr val="accent1"/>
-          </a:effectRef>
-          <a:fontRef idx="minor">
-            <a:schemeClr val="lt1"/>
-          </a:fontRef>
-        </p:style>
-        <p:txBody>
-          <a:bodyPr rtlCol="0" anchor="ctr"/>
-          <a:lstStyle/>
-          <a:p>
-            <a:pPr algn="ctr"/>
-          </a:p>
-        </p:txBody>
-      </p:sp>
-      <p:sp>
-        <p:nvSpPr>
-          <p:cNvPr id="12" name="TextBox 11"/>
-          <p:cNvSpPr txBox="1"/>
-          <p:nvPr/>
-        </p:nvSpPr>
-        <p:spPr>
-          <a:xfrm>
-            <a:off x="1371600" y="4895088"/>
-            <a:ext cx="9997135" cy="457200"/>
-          </a:xfrm>
-          <a:prstGeom prst="rect">
-            <a:avLst/>
-          </a:prstGeom>
-          <a:noFill/>
-        </p:spPr>
-        <p:txBody>
-          <a:bodyPr wrap="square" anchor="t" lIns="0" rIns="0" tIns="0" bIns="0">
-            <a:spAutoFit/>
-          </a:bodyPr>
-          <a:lstStyle/>
-          <a:p>
-            <a:pPr algn="l">
-              <a:lnSpc>
-                <a:spcPct val="110000"/>
-              </a:lnSpc>
-            </a:pPr>
-            <a:r>
-              <a:rPr sz="1600" b="1">
-                <a:solidFill>
-                  <a:srgbClr val="1C2A33"/>
-                </a:solidFill>
-                <a:latin typeface="微软雅黑"/>
-                <a:ea typeface="微软雅黑"/>
-                <a:cs typeface="微软雅黑"/>
-              </a:rPr>
-              <a:t/>
-            </a:r>
-          </a:p>
-        </p:txBody>
-      </p:sp>
-      <p:sp>
-        <p:nvSpPr>
-          <p:cNvPr id="13" name="TextBox 12"/>
-          <p:cNvSpPr txBox="1"/>
-          <p:nvPr/>
-        </p:nvSpPr>
-        <p:spPr>
-          <a:xfrm>
-            <a:off x="1371600" y="5334000"/>
-            <a:ext cx="9997135" cy="957072"/>
-          </a:xfrm>
-          <a:prstGeom prst="rect">
-            <a:avLst/>
-          </a:prstGeom>
-          <a:noFill/>
-        </p:spPr>
-        <p:txBody>
-          <a:bodyPr wrap="square" anchor="t" lIns="0" rIns="0" tIns="0" bIns="0">
-            <a:spAutoFit/>
-          </a:bodyPr>
-          <a:lstStyle/>
-          <a:p>
-            <a:pPr algn="l">
-              <a:lnSpc>
-                <a:spcPct val="128000"/>
-              </a:lnSpc>
-            </a:pPr>
-            <a:r>
-              <a:rPr sz="1300" b="0">
-                <a:solidFill>
-                  <a:srgbClr val="1C2A33"/>
-                </a:solidFill>
-                <a:latin typeface="楷体"/>
-                <a:ea typeface="楷体"/>
-                <a:cs typeface="楷体"/>
-              </a:rPr>
-              <a:t>③ 反思单：回顾路径——调查(方法)→撰写(成文)→倡议(行动)。</a:t>
-            </a:r>
-          </a:p>
-        </p:txBody>
-      </p:sp>
-      <p:sp>
-        <p:nvSpPr>
-          <p:cNvPr id="14" name="TextBox 13"/>
+              <a:t>反思单：回顾路径——调查(方法)→撰写(成文)→倡议(行动)。</a:t>
+            </a:r>
+          </a:p>
+        </p:txBody>
+      </p:sp>
+      <p:sp>
+        <p:nvSpPr>
+          <p:cNvPr id="18" name="TextBox 17"/>
           <p:cNvSpPr txBox="1"/>
           <p:nvPr/>
         </p:nvSpPr>
@@ -5391,13 +5438,13 @@
             <a:r>
               <a:rPr sz="1300" b="1">
                 <a:solidFill>
-                  <a:srgbClr val="2E7D6B"/>
+                  <a:srgbClr val="B23A2A"/>
                 </a:solidFill>
                 <a:latin typeface="微软雅黑"/>
                 <a:ea typeface="微软雅黑"/>
                 <a:cs typeface="微软雅黑"/>
               </a:rPr>
-              <a:t>学习路径</a:t>
+              <a:t>方法</a:t>
             </a:r>
           </a:p>
         </p:txBody>
@@ -5414,6 +5461,338 @@
             <a:ext cx="822960" cy="30480"/>
           </a:xfrm>
           <a:prstGeom prst="rect">
+            <a:avLst/>
+          </a:prstGeom>
+          <a:solidFill>
+            <a:srgbClr val="B23A2A"/>
+          </a:solidFill>
+          <a:ln>
+            <a:noFill/>
+          </a:ln>
+          <a:effectLst/>
+        </p:spPr>
+        <p:style>
+          <a:lnRef idx="1">
+            <a:schemeClr val="accent1"/>
+          </a:lnRef>
+          <a:fillRef idx="3">
+            <a:schemeClr val="accent1"/>
+          </a:fillRef>
+          <a:effectRef idx="2">
+            <a:schemeClr val="accent1"/>
+          </a:effectRef>
+          <a:fontRef idx="minor">
+            <a:schemeClr val="lt1"/>
+          </a:fontRef>
+        </p:style>
+        <p:txBody>
+          <a:bodyPr rtlCol="0" anchor="ctr"/>
+          <a:lstStyle/>
+          <a:p>
+            <a:pPr algn="ctr"/>
+          </a:p>
+        </p:txBody>
+      </p:sp>
+      <p:sp>
+        <p:nvSpPr>
+          <p:cNvPr id="5" name="TextBox 4"/>
+          <p:cNvSpPr txBox="1"/>
+          <p:nvPr/>
+        </p:nvSpPr>
+        <p:spPr>
+          <a:xfrm>
+            <a:off x="640080" y="1280160"/>
+            <a:ext cx="10058400" cy="548640"/>
+          </a:xfrm>
+          <a:prstGeom prst="rect">
+            <a:avLst/>
+          </a:prstGeom>
+          <a:noFill/>
+        </p:spPr>
+        <p:txBody>
+          <a:bodyPr wrap="square" anchor="t" lIns="0" rIns="0" tIns="0" bIns="0">
+            <a:spAutoFit/>
+          </a:bodyPr>
+          <a:lstStyle/>
+          <a:p>
+            <a:pPr algn="l"/>
+            <a:r>
+              <a:rPr sz="2800" b="1">
+                <a:solidFill>
+                  <a:srgbClr val="1C2A33"/>
+                </a:solidFill>
+                <a:latin typeface="楷体"/>
+                <a:ea typeface="楷体"/>
+                <a:cs typeface="楷体"/>
+              </a:rPr>
+              <a:t>学习路径</a:t>
+            </a:r>
+          </a:p>
+        </p:txBody>
+      </p:sp>
+      <p:sp>
+        <p:nvSpPr>
+          <p:cNvPr id="6" name="Rounded Rectangle 5"/>
+          <p:cNvSpPr/>
+          <p:nvPr/>
+        </p:nvSpPr>
+        <p:spPr>
+          <a:xfrm>
+            <a:off x="640080" y="1920240"/>
+            <a:ext cx="10911535" cy="868680"/>
+          </a:xfrm>
+          <a:prstGeom prst="roundRect">
+            <a:avLst/>
+          </a:prstGeom>
+          <a:solidFill>
+            <a:srgbClr val="FFFFFF"/>
+          </a:solidFill>
+          <a:ln w="20320">
+            <a:solidFill>
+              <a:srgbClr val="B23A2A"/>
+            </a:solidFill>
+          </a:ln>
+          <a:effectLst/>
+        </p:spPr>
+        <p:style>
+          <a:lnRef idx="1">
+            <a:schemeClr val="accent1"/>
+          </a:lnRef>
+          <a:fillRef idx="3">
+            <a:schemeClr val="accent1"/>
+          </a:fillRef>
+          <a:effectRef idx="2">
+            <a:schemeClr val="accent1"/>
+          </a:effectRef>
+          <a:fontRef idx="minor">
+            <a:schemeClr val="lt1"/>
+          </a:fontRef>
+        </p:style>
+        <p:txBody>
+          <a:bodyPr rtlCol="0" anchor="ctr"/>
+          <a:lstStyle/>
+          <a:p>
+            <a:pPr algn="ctr"/>
+          </a:p>
+        </p:txBody>
+      </p:sp>
+      <p:sp>
+        <p:nvSpPr>
+          <p:cNvPr id="7" name="Oval 6"/>
+          <p:cNvSpPr/>
+          <p:nvPr/>
+        </p:nvSpPr>
+        <p:spPr>
+          <a:xfrm>
+            <a:off x="841248" y="2121408"/>
+            <a:ext cx="457200" cy="457200"/>
+          </a:xfrm>
+          <a:prstGeom prst="ellipse">
+            <a:avLst/>
+          </a:prstGeom>
+          <a:solidFill>
+            <a:srgbClr val="B23A2A"/>
+          </a:solidFill>
+          <a:ln>
+            <a:noFill/>
+          </a:ln>
+          <a:effectLst/>
+        </p:spPr>
+        <p:style>
+          <a:lnRef idx="1">
+            <a:schemeClr val="accent1"/>
+          </a:lnRef>
+          <a:fillRef idx="3">
+            <a:schemeClr val="accent1"/>
+          </a:fillRef>
+          <a:effectRef idx="2">
+            <a:schemeClr val="accent1"/>
+          </a:effectRef>
+          <a:fontRef idx="minor">
+            <a:schemeClr val="lt1"/>
+          </a:fontRef>
+        </p:style>
+        <p:txBody>
+          <a:bodyPr rtlCol="0" anchor="ctr"/>
+          <a:lstStyle/>
+          <a:p>
+            <a:pPr algn="ctr"/>
+          </a:p>
+        </p:txBody>
+      </p:sp>
+      <p:sp>
+        <p:nvSpPr>
+          <p:cNvPr id="8" name="TextBox 7"/>
+          <p:cNvSpPr txBox="1"/>
+          <p:nvPr/>
+        </p:nvSpPr>
+        <p:spPr>
+          <a:xfrm>
+            <a:off x="841248" y="2194560"/>
+            <a:ext cx="457200" cy="365760"/>
+          </a:xfrm>
+          <a:prstGeom prst="rect">
+            <a:avLst/>
+          </a:prstGeom>
+          <a:noFill/>
+        </p:spPr>
+        <p:txBody>
+          <a:bodyPr wrap="square" anchor="t" lIns="0" rIns="0" tIns="0" bIns="0">
+            <a:spAutoFit/>
+          </a:bodyPr>
+          <a:lstStyle/>
+          <a:p>
+            <a:pPr algn="ctr"/>
+            <a:r>
+              <a:rPr sz="1600" b="1">
+                <a:solidFill>
+                  <a:srgbClr val="FFFFFF"/>
+                </a:solidFill>
+                <a:latin typeface="微软雅黑"/>
+                <a:ea typeface="微软雅黑"/>
+                <a:cs typeface="微软雅黑"/>
+              </a:rPr>
+              <a:t>1</a:t>
+            </a:r>
+          </a:p>
+        </p:txBody>
+      </p:sp>
+      <p:sp>
+        <p:nvSpPr>
+          <p:cNvPr id="9" name="TextBox 8"/>
+          <p:cNvSpPr txBox="1"/>
+          <p:nvPr/>
+        </p:nvSpPr>
+        <p:spPr>
+          <a:xfrm>
+            <a:off x="1508760" y="2039112"/>
+            <a:ext cx="2377440" cy="640080"/>
+          </a:xfrm>
+          <a:prstGeom prst="rect">
+            <a:avLst/>
+          </a:prstGeom>
+          <a:noFill/>
+        </p:spPr>
+        <p:txBody>
+          <a:bodyPr wrap="square" anchor="t" lIns="0" rIns="0" tIns="0" bIns="0">
+            <a:spAutoFit/>
+          </a:bodyPr>
+          <a:lstStyle/>
+          <a:p>
+            <a:pPr algn="l"/>
+            <a:r>
+              <a:rPr sz="1600" b="1">
+                <a:solidFill>
+                  <a:srgbClr val="B23A2A"/>
+                </a:solidFill>
+                <a:latin typeface="微软雅黑"/>
+                <a:ea typeface="微软雅黑"/>
+                <a:cs typeface="微软雅黑"/>
+              </a:rPr>
+              <a:t>成果展览法</a:t>
+            </a:r>
+          </a:p>
+        </p:txBody>
+      </p:sp>
+      <p:sp>
+        <p:nvSpPr>
+          <p:cNvPr id="10" name="TextBox 9"/>
+          <p:cNvSpPr txBox="1"/>
+          <p:nvPr/>
+        </p:nvSpPr>
+        <p:spPr>
+          <a:xfrm>
+            <a:off x="3931920" y="2039112"/>
+            <a:ext cx="7436815" cy="640080"/>
+          </a:xfrm>
+          <a:prstGeom prst="rect">
+            <a:avLst/>
+          </a:prstGeom>
+          <a:noFill/>
+        </p:spPr>
+        <p:txBody>
+          <a:bodyPr wrap="square" anchor="t" lIns="0" rIns="0" tIns="0" bIns="0">
+            <a:spAutoFit/>
+          </a:bodyPr>
+          <a:lstStyle/>
+          <a:p>
+            <a:pPr algn="l">
+              <a:lnSpc>
+                <a:spcPct val="130000"/>
+              </a:lnSpc>
+            </a:pPr>
+            <a:r>
+              <a:rPr sz="1400" b="0">
+                <a:solidFill>
+                  <a:srgbClr val="1C2A33"/>
+                </a:solidFill>
+                <a:latin typeface="楷体"/>
+                <a:ea typeface="楷体"/>
+                <a:cs typeface="楷体"/>
+              </a:rPr>
+              <a:t>卡片墙+张贴。</a:t>
+            </a:r>
+          </a:p>
+        </p:txBody>
+      </p:sp>
+      <p:sp>
+        <p:nvSpPr>
+          <p:cNvPr id="11" name="Rounded Rectangle 10"/>
+          <p:cNvSpPr/>
+          <p:nvPr/>
+        </p:nvSpPr>
+        <p:spPr>
+          <a:xfrm>
+            <a:off x="640080" y="2944368"/>
+            <a:ext cx="10911535" cy="868680"/>
+          </a:xfrm>
+          <a:prstGeom prst="roundRect">
+            <a:avLst/>
+          </a:prstGeom>
+          <a:solidFill>
+            <a:srgbClr val="FFFFFF"/>
+          </a:solidFill>
+          <a:ln w="20320">
+            <a:solidFill>
+              <a:srgbClr val="2E7D6B"/>
+            </a:solidFill>
+          </a:ln>
+          <a:effectLst/>
+        </p:spPr>
+        <p:style>
+          <a:lnRef idx="1">
+            <a:schemeClr val="accent1"/>
+          </a:lnRef>
+          <a:fillRef idx="3">
+            <a:schemeClr val="accent1"/>
+          </a:fillRef>
+          <a:effectRef idx="2">
+            <a:schemeClr val="accent1"/>
+          </a:effectRef>
+          <a:fontRef idx="minor">
+            <a:schemeClr val="lt1"/>
+          </a:fontRef>
+        </p:style>
+        <p:txBody>
+          <a:bodyPr rtlCol="0" anchor="ctr"/>
+          <a:lstStyle/>
+          <a:p>
+            <a:pPr algn="ctr"/>
+          </a:p>
+        </p:txBody>
+      </p:sp>
+      <p:sp>
+        <p:nvSpPr>
+          <p:cNvPr id="12" name="Oval 11"/>
+          <p:cNvSpPr/>
+          <p:nvPr/>
+        </p:nvSpPr>
+        <p:spPr>
+          <a:xfrm>
+            <a:off x="841248" y="3145536"/>
+            <a:ext cx="457200" cy="457200"/>
+          </a:xfrm>
+          <a:prstGeom prst="ellipse">
             <a:avLst/>
           </a:prstGeom>
           <a:solidFill>
@@ -5448,14 +5827,129 @@
       </p:sp>
       <p:sp>
         <p:nvSpPr>
-          <p:cNvPr id="5" name="Rounded Rectangle 4"/>
+          <p:cNvPr id="13" name="TextBox 12"/>
+          <p:cNvSpPr txBox="1"/>
+          <p:nvPr/>
+        </p:nvSpPr>
+        <p:spPr>
+          <a:xfrm>
+            <a:off x="841248" y="3218688"/>
+            <a:ext cx="457200" cy="365760"/>
+          </a:xfrm>
+          <a:prstGeom prst="rect">
+            <a:avLst/>
+          </a:prstGeom>
+          <a:noFill/>
+        </p:spPr>
+        <p:txBody>
+          <a:bodyPr wrap="square" anchor="t" lIns="0" rIns="0" tIns="0" bIns="0">
+            <a:spAutoFit/>
+          </a:bodyPr>
+          <a:lstStyle/>
+          <a:p>
+            <a:pPr algn="ctr"/>
+            <a:r>
+              <a:rPr sz="1600" b="1">
+                <a:solidFill>
+                  <a:srgbClr val="FFFFFF"/>
+                </a:solidFill>
+                <a:latin typeface="微软雅黑"/>
+                <a:ea typeface="微软雅黑"/>
+                <a:cs typeface="微软雅黑"/>
+              </a:rPr>
+              <a:t>2</a:t>
+            </a:r>
+          </a:p>
+        </p:txBody>
+      </p:sp>
+      <p:sp>
+        <p:nvSpPr>
+          <p:cNvPr id="14" name="TextBox 13"/>
+          <p:cNvSpPr txBox="1"/>
+          <p:nvPr/>
+        </p:nvSpPr>
+        <p:spPr>
+          <a:xfrm>
+            <a:off x="1508760" y="3063240"/>
+            <a:ext cx="2377440" cy="640080"/>
+          </a:xfrm>
+          <a:prstGeom prst="rect">
+            <a:avLst/>
+          </a:prstGeom>
+          <a:noFill/>
+        </p:spPr>
+        <p:txBody>
+          <a:bodyPr wrap="square" anchor="t" lIns="0" rIns="0" tIns="0" bIns="0">
+            <a:spAutoFit/>
+          </a:bodyPr>
+          <a:lstStyle/>
+          <a:p>
+            <a:pPr algn="l"/>
+            <a:r>
+              <a:rPr sz="1600" b="1">
+                <a:solidFill>
+                  <a:srgbClr val="2E7D6B"/>
+                </a:solidFill>
+                <a:latin typeface="微软雅黑"/>
+                <a:ea typeface="微软雅黑"/>
+                <a:cs typeface="微软雅黑"/>
+              </a:rPr>
+              <a:t>分享工作坊</a:t>
+            </a:r>
+          </a:p>
+        </p:txBody>
+      </p:sp>
+      <p:sp>
+        <p:nvSpPr>
+          <p:cNvPr id="15" name="TextBox 14"/>
+          <p:cNvSpPr txBox="1"/>
+          <p:nvPr/>
+        </p:nvSpPr>
+        <p:spPr>
+          <a:xfrm>
+            <a:off x="3931920" y="3063240"/>
+            <a:ext cx="7436815" cy="640080"/>
+          </a:xfrm>
+          <a:prstGeom prst="rect">
+            <a:avLst/>
+          </a:prstGeom>
+          <a:noFill/>
+        </p:spPr>
+        <p:txBody>
+          <a:bodyPr wrap="square" anchor="t" lIns="0" rIns="0" tIns="0" bIns="0">
+            <a:spAutoFit/>
+          </a:bodyPr>
+          <a:lstStyle/>
+          <a:p>
+            <a:pPr algn="l">
+              <a:lnSpc>
+                <a:spcPct val="130000"/>
+              </a:lnSpc>
+            </a:pPr>
+            <a:r>
+              <a:rPr sz="1400" b="0">
+                <a:solidFill>
+                  <a:srgbClr val="1C2A33"/>
+                </a:solidFill>
+                <a:latin typeface="楷体"/>
+                <a:ea typeface="楷体"/>
+                <a:cs typeface="楷体"/>
+              </a:rPr>
+              <a:t>三句话框架。</a:t>
+            </a:r>
+          </a:p>
+        </p:txBody>
+      </p:sp>
+      <p:sp>
+        <p:nvSpPr>
+          <p:cNvPr id="16" name="Rounded Rectangle 15"/>
           <p:cNvSpPr/>
           <p:nvPr/>
         </p:nvSpPr>
         <p:spPr>
           <a:xfrm>
-            <a:off x="640080" y="1371600"/>
-            <a:ext cx="10911535" cy="685800"/>
+            <a:off x="640080" y="3968496"/>
+            <a:ext cx="10911535" cy="868680"/>
           </a:xfrm>
           <a:prstGeom prst="roundRect">
             <a:avLst/>
@@ -5463,9 +5957,9 @@
           <a:solidFill>
             <a:srgbClr val="FFFFFF"/>
           </a:solidFill>
-          <a:ln w="22860">
+          <a:ln w="20320">
             <a:solidFill>
-              <a:srgbClr val="2E7D6B"/>
+              <a:srgbClr val="C8A86B"/>
             </a:solidFill>
           </a:ln>
           <a:effectLst/>
@@ -5494,20 +5988,20 @@
       </p:sp>
       <p:sp>
         <p:nvSpPr>
-          <p:cNvPr id="6" name="Oval 5"/>
+          <p:cNvPr id="17" name="Oval 16"/>
           <p:cNvSpPr/>
           <p:nvPr/>
         </p:nvSpPr>
         <p:spPr>
           <a:xfrm>
-            <a:off x="804672" y="1536192"/>
+            <a:off x="841248" y="4169664"/>
             <a:ext cx="457200" cy="457200"/>
           </a:xfrm>
           <a:prstGeom prst="ellipse">
             <a:avLst/>
           </a:prstGeom>
           <a:solidFill>
-            <a:srgbClr val="2E7D6B"/>
+            <a:srgbClr val="C8A86B"/>
           </a:solidFill>
           <a:ln>
             <a:noFill/>
@@ -5538,14 +6032,14 @@
       </p:sp>
       <p:sp>
         <p:nvSpPr>
-          <p:cNvPr id="7" name="TextBox 6"/>
+          <p:cNvPr id="18" name="TextBox 17"/>
           <p:cNvSpPr txBox="1"/>
           <p:nvPr/>
         </p:nvSpPr>
         <p:spPr>
           <a:xfrm>
-            <a:off x="804672" y="1591056"/>
-            <a:ext cx="457200" cy="384048"/>
+            <a:off x="841248" y="4242816"/>
+            <a:ext cx="457200" cy="365760"/>
           </a:xfrm>
           <a:prstGeom prst="rect">
             <a:avLst/>
@@ -5568,21 +6062,21 @@
                 <a:ea typeface="微软雅黑"/>
                 <a:cs typeface="微软雅黑"/>
               </a:rPr>
-              <a:t>1</a:t>
-            </a:r>
-          </a:p>
-        </p:txBody>
-      </p:sp>
-      <p:sp>
-        <p:nvSpPr>
-          <p:cNvPr id="8" name="TextBox 7"/>
+              <a:t>3</a:t>
+            </a:r>
+          </a:p>
+        </p:txBody>
+      </p:sp>
+      <p:sp>
+        <p:nvSpPr>
+          <p:cNvPr id="19" name="TextBox 18"/>
           <p:cNvSpPr txBox="1"/>
           <p:nvPr/>
         </p:nvSpPr>
         <p:spPr>
           <a:xfrm>
-            <a:off x="1371600" y="1481328"/>
-            <a:ext cx="9997135" cy="484632"/>
+            <a:off x="1508760" y="4087368"/>
+            <a:ext cx="2377440" cy="640080"/>
           </a:xfrm>
           <a:prstGeom prst="rect">
             <a:avLst/>
@@ -5595,35 +6089,72 @@
           </a:bodyPr>
           <a:lstStyle/>
           <a:p>
-            <a:pPr algn="l">
-              <a:lnSpc>
-                <a:spcPct val="110000"/>
-              </a:lnSpc>
-            </a:pPr>
+            <a:pPr algn="l"/>
             <a:r>
               <a:rPr sz="1600" b="1">
                 <a:solidFill>
-                  <a:srgbClr val="1C2A33"/>
+                  <a:srgbClr val="C8A86B"/>
                 </a:solidFill>
                 <a:latin typeface="微软雅黑"/>
                 <a:ea typeface="微软雅黑"/>
                 <a:cs typeface="微软雅黑"/>
               </a:rPr>
-              <a:t>Step 1 布置成果展</a:t>
-            </a:r>
-          </a:p>
-        </p:txBody>
-      </p:sp>
-      <p:sp>
-        <p:nvSpPr>
-          <p:cNvPr id="9" name="Rounded Rectangle 8"/>
+              <a:t>反思单法</a:t>
+            </a:r>
+          </a:p>
+        </p:txBody>
+      </p:sp>
+      <p:sp>
+        <p:nvSpPr>
+          <p:cNvPr id="20" name="TextBox 19"/>
+          <p:cNvSpPr txBox="1"/>
+          <p:nvPr/>
+        </p:nvSpPr>
+        <p:spPr>
+          <a:xfrm>
+            <a:off x="3931920" y="4087368"/>
+            <a:ext cx="7436815" cy="640080"/>
+          </a:xfrm>
+          <a:prstGeom prst="rect">
+            <a:avLst/>
+          </a:prstGeom>
+          <a:noFill/>
+        </p:spPr>
+        <p:txBody>
+          <a:bodyPr wrap="square" anchor="t" lIns="0" rIns="0" tIns="0" bIns="0">
+            <a:spAutoFit/>
+          </a:bodyPr>
+          <a:lstStyle/>
+          <a:p>
+            <a:pPr algn="l">
+              <a:lnSpc>
+                <a:spcPct val="130000"/>
+              </a:lnSpc>
+            </a:pPr>
+            <a:r>
+              <a:rPr sz="1400" b="0">
+                <a:solidFill>
+                  <a:srgbClr val="1C2A33"/>
+                </a:solidFill>
+                <a:latin typeface="楷体"/>
+                <a:ea typeface="楷体"/>
+                <a:cs typeface="楷体"/>
+              </a:rPr>
+              <a:t>结构化元认知。</a:t>
+            </a:r>
+          </a:p>
+        </p:txBody>
+      </p:sp>
+      <p:sp>
+        <p:nvSpPr>
+          <p:cNvPr id="21" name="Rounded Rectangle 20"/>
           <p:cNvSpPr/>
           <p:nvPr/>
         </p:nvSpPr>
         <p:spPr>
           <a:xfrm>
-            <a:off x="640080" y="2194560"/>
-            <a:ext cx="10911535" cy="685800"/>
+            <a:off x="640080" y="4992624"/>
+            <a:ext cx="10911535" cy="868680"/>
           </a:xfrm>
           <a:prstGeom prst="roundRect">
             <a:avLst/>
@@ -5631,9 +6162,9 @@
           <a:solidFill>
             <a:srgbClr val="FFFFFF"/>
           </a:solidFill>
-          <a:ln w="22860">
+          <a:ln w="20320">
             <a:solidFill>
-              <a:srgbClr val="2E7D6B"/>
+              <a:srgbClr val="6B6258"/>
             </a:solidFill>
           </a:ln>
           <a:effectLst/>
@@ -5662,20 +6193,20 @@
       </p:sp>
       <p:sp>
         <p:nvSpPr>
-          <p:cNvPr id="10" name="Oval 9"/>
+          <p:cNvPr id="22" name="Oval 21"/>
           <p:cNvSpPr/>
           <p:nvPr/>
         </p:nvSpPr>
         <p:spPr>
           <a:xfrm>
-            <a:off x="804672" y="2359152"/>
+            <a:off x="841248" y="5193792"/>
             <a:ext cx="457200" cy="457200"/>
           </a:xfrm>
           <a:prstGeom prst="ellipse">
             <a:avLst/>
           </a:prstGeom>
           <a:solidFill>
-            <a:srgbClr val="2E7D6B"/>
+            <a:srgbClr val="6B6258"/>
           </a:solidFill>
           <a:ln>
             <a:noFill/>
@@ -5706,350 +6237,14 @@
       </p:sp>
       <p:sp>
         <p:nvSpPr>
-          <p:cNvPr id="11" name="TextBox 10"/>
+          <p:cNvPr id="23" name="TextBox 22"/>
           <p:cNvSpPr txBox="1"/>
           <p:nvPr/>
         </p:nvSpPr>
         <p:spPr>
           <a:xfrm>
-            <a:off x="804672" y="2414016"/>
-            <a:ext cx="457200" cy="384048"/>
-          </a:xfrm>
-          <a:prstGeom prst="rect">
-            <a:avLst/>
-          </a:prstGeom>
-          <a:noFill/>
-        </p:spPr>
-        <p:txBody>
-          <a:bodyPr wrap="square" anchor="t" lIns="0" rIns="0" tIns="0" bIns="0">
-            <a:spAutoFit/>
-          </a:bodyPr>
-          <a:lstStyle/>
-          <a:p>
-            <a:pPr algn="ctr"/>
-            <a:r>
-              <a:rPr sz="1600" b="1">
-                <a:solidFill>
-                  <a:srgbClr val="FFFFFF"/>
-                </a:solidFill>
-                <a:latin typeface="微软雅黑"/>
-                <a:ea typeface="微软雅黑"/>
-                <a:cs typeface="微软雅黑"/>
-              </a:rPr>
-              <a:t>2</a:t>
-            </a:r>
-          </a:p>
-        </p:txBody>
-      </p:sp>
-      <p:sp>
-        <p:nvSpPr>
-          <p:cNvPr id="12" name="TextBox 11"/>
-          <p:cNvSpPr txBox="1"/>
-          <p:nvPr/>
-        </p:nvSpPr>
-        <p:spPr>
-          <a:xfrm>
-            <a:off x="1371600" y="2304288"/>
-            <a:ext cx="9997135" cy="484632"/>
-          </a:xfrm>
-          <a:prstGeom prst="rect">
-            <a:avLst/>
-          </a:prstGeom>
-          <a:noFill/>
-        </p:spPr>
-        <p:txBody>
-          <a:bodyPr wrap="square" anchor="t" lIns="0" rIns="0" tIns="0" bIns="0">
-            <a:spAutoFit/>
-          </a:bodyPr>
-          <a:lstStyle/>
-          <a:p>
-            <a:pPr algn="l">
-              <a:lnSpc>
-                <a:spcPct val="110000"/>
-              </a:lnSpc>
-            </a:pPr>
-            <a:r>
-              <a:rPr sz="1400" b="1">
-                <a:solidFill>
-                  <a:srgbClr val="1C2A33"/>
-                </a:solidFill>
-                <a:latin typeface="微软雅黑"/>
-                <a:ea typeface="微软雅黑"/>
-                <a:cs typeface="微软雅黑"/>
-              </a:rPr>
-              <a:t>Step 2 代表分享（上）</a:t>
-            </a:r>
-          </a:p>
-        </p:txBody>
-      </p:sp>
-      <p:sp>
-        <p:nvSpPr>
-          <p:cNvPr id="13" name="Rounded Rectangle 12"/>
-          <p:cNvSpPr/>
-          <p:nvPr/>
-        </p:nvSpPr>
-        <p:spPr>
-          <a:xfrm>
-            <a:off x="640080" y="3017520"/>
-            <a:ext cx="10911535" cy="685800"/>
-          </a:xfrm>
-          <a:prstGeom prst="roundRect">
-            <a:avLst/>
-          </a:prstGeom>
-          <a:solidFill>
-            <a:srgbClr val="FFFFFF"/>
-          </a:solidFill>
-          <a:ln w="22860">
-            <a:solidFill>
-              <a:srgbClr val="2E7D6B"/>
-            </a:solidFill>
-          </a:ln>
-          <a:effectLst/>
-        </p:spPr>
-        <p:style>
-          <a:lnRef idx="1">
-            <a:schemeClr val="accent1"/>
-          </a:lnRef>
-          <a:fillRef idx="3">
-            <a:schemeClr val="accent1"/>
-          </a:fillRef>
-          <a:effectRef idx="2">
-            <a:schemeClr val="accent1"/>
-          </a:effectRef>
-          <a:fontRef idx="minor">
-            <a:schemeClr val="lt1"/>
-          </a:fontRef>
-        </p:style>
-        <p:txBody>
-          <a:bodyPr rtlCol="0" anchor="ctr"/>
-          <a:lstStyle/>
-          <a:p>
-            <a:pPr algn="ctr"/>
-          </a:p>
-        </p:txBody>
-      </p:sp>
-      <p:sp>
-        <p:nvSpPr>
-          <p:cNvPr id="14" name="Oval 13"/>
-          <p:cNvSpPr/>
-          <p:nvPr/>
-        </p:nvSpPr>
-        <p:spPr>
-          <a:xfrm>
-            <a:off x="804672" y="3182112"/>
-            <a:ext cx="457200" cy="457200"/>
-          </a:xfrm>
-          <a:prstGeom prst="ellipse">
-            <a:avLst/>
-          </a:prstGeom>
-          <a:solidFill>
-            <a:srgbClr val="2E7D6B"/>
-          </a:solidFill>
-          <a:ln>
-            <a:noFill/>
-          </a:ln>
-          <a:effectLst/>
-        </p:spPr>
-        <p:style>
-          <a:lnRef idx="1">
-            <a:schemeClr val="accent1"/>
-          </a:lnRef>
-          <a:fillRef idx="3">
-            <a:schemeClr val="accent1"/>
-          </a:fillRef>
-          <a:effectRef idx="2">
-            <a:schemeClr val="accent1"/>
-          </a:effectRef>
-          <a:fontRef idx="minor">
-            <a:schemeClr val="lt1"/>
-          </a:fontRef>
-        </p:style>
-        <p:txBody>
-          <a:bodyPr rtlCol="0" anchor="ctr"/>
-          <a:lstStyle/>
-          <a:p>
-            <a:pPr algn="ctr"/>
-          </a:p>
-        </p:txBody>
-      </p:sp>
-      <p:sp>
-        <p:nvSpPr>
-          <p:cNvPr id="15" name="TextBox 14"/>
-          <p:cNvSpPr txBox="1"/>
-          <p:nvPr/>
-        </p:nvSpPr>
-        <p:spPr>
-          <a:xfrm>
-            <a:off x="804672" y="3236976"/>
-            <a:ext cx="457200" cy="384048"/>
-          </a:xfrm>
-          <a:prstGeom prst="rect">
-            <a:avLst/>
-          </a:prstGeom>
-          <a:noFill/>
-        </p:spPr>
-        <p:txBody>
-          <a:bodyPr wrap="square" anchor="t" lIns="0" rIns="0" tIns="0" bIns="0">
-            <a:spAutoFit/>
-          </a:bodyPr>
-          <a:lstStyle/>
-          <a:p>
-            <a:pPr algn="ctr"/>
-            <a:r>
-              <a:rPr sz="1600" b="1">
-                <a:solidFill>
-                  <a:srgbClr val="FFFFFF"/>
-                </a:solidFill>
-                <a:latin typeface="微软雅黑"/>
-                <a:ea typeface="微软雅黑"/>
-                <a:cs typeface="微软雅黑"/>
-              </a:rPr>
-              <a:t>3</a:t>
-            </a:r>
-          </a:p>
-        </p:txBody>
-      </p:sp>
-      <p:sp>
-        <p:nvSpPr>
-          <p:cNvPr id="16" name="TextBox 15"/>
-          <p:cNvSpPr txBox="1"/>
-          <p:nvPr/>
-        </p:nvSpPr>
-        <p:spPr>
-          <a:xfrm>
-            <a:off x="1371600" y="3127248"/>
-            <a:ext cx="9997135" cy="484632"/>
-          </a:xfrm>
-          <a:prstGeom prst="rect">
-            <a:avLst/>
-          </a:prstGeom>
-          <a:noFill/>
-        </p:spPr>
-        <p:txBody>
-          <a:bodyPr wrap="square" anchor="t" lIns="0" rIns="0" tIns="0" bIns="0">
-            <a:spAutoFit/>
-          </a:bodyPr>
-          <a:lstStyle/>
-          <a:p>
-            <a:pPr algn="l">
-              <a:lnSpc>
-                <a:spcPct val="110000"/>
-              </a:lnSpc>
-            </a:pPr>
-            <a:r>
-              <a:rPr sz="1600" b="1">
-                <a:solidFill>
-                  <a:srgbClr val="1C2A33"/>
-                </a:solidFill>
-                <a:latin typeface="微软雅黑"/>
-                <a:ea typeface="微软雅黑"/>
-                <a:cs typeface="微软雅黑"/>
-              </a:rPr>
-              <a:t>Step 3 参观互评</a:t>
-            </a:r>
-          </a:p>
-        </p:txBody>
-      </p:sp>
-      <p:sp>
-        <p:nvSpPr>
-          <p:cNvPr id="17" name="Rounded Rectangle 16"/>
-          <p:cNvSpPr/>
-          <p:nvPr/>
-        </p:nvSpPr>
-        <p:spPr>
-          <a:xfrm>
-            <a:off x="640080" y="3840480"/>
-            <a:ext cx="10911535" cy="685800"/>
-          </a:xfrm>
-          <a:prstGeom prst="roundRect">
-            <a:avLst/>
-          </a:prstGeom>
-          <a:solidFill>
-            <a:srgbClr val="FFFFFF"/>
-          </a:solidFill>
-          <a:ln w="22860">
-            <a:solidFill>
-              <a:srgbClr val="2E7D6B"/>
-            </a:solidFill>
-          </a:ln>
-          <a:effectLst/>
-        </p:spPr>
-        <p:style>
-          <a:lnRef idx="1">
-            <a:schemeClr val="accent1"/>
-          </a:lnRef>
-          <a:fillRef idx="3">
-            <a:schemeClr val="accent1"/>
-          </a:fillRef>
-          <a:effectRef idx="2">
-            <a:schemeClr val="accent1"/>
-          </a:effectRef>
-          <a:fontRef idx="minor">
-            <a:schemeClr val="lt1"/>
-          </a:fontRef>
-        </p:style>
-        <p:txBody>
-          <a:bodyPr rtlCol="0" anchor="ctr"/>
-          <a:lstStyle/>
-          <a:p>
-            <a:pPr algn="ctr"/>
-          </a:p>
-        </p:txBody>
-      </p:sp>
-      <p:sp>
-        <p:nvSpPr>
-          <p:cNvPr id="18" name="Oval 17"/>
-          <p:cNvSpPr/>
-          <p:nvPr/>
-        </p:nvSpPr>
-        <p:spPr>
-          <a:xfrm>
-            <a:off x="804672" y="4005072"/>
-            <a:ext cx="457200" cy="457200"/>
-          </a:xfrm>
-          <a:prstGeom prst="ellipse">
-            <a:avLst/>
-          </a:prstGeom>
-          <a:solidFill>
-            <a:srgbClr val="2E7D6B"/>
-          </a:solidFill>
-          <a:ln>
-            <a:noFill/>
-          </a:ln>
-          <a:effectLst/>
-        </p:spPr>
-        <p:style>
-          <a:lnRef idx="1">
-            <a:schemeClr val="accent1"/>
-          </a:lnRef>
-          <a:fillRef idx="3">
-            <a:schemeClr val="accent1"/>
-          </a:fillRef>
-          <a:effectRef idx="2">
-            <a:schemeClr val="accent1"/>
-          </a:effectRef>
-          <a:fontRef idx="minor">
-            <a:schemeClr val="lt1"/>
-          </a:fontRef>
-        </p:style>
-        <p:txBody>
-          <a:bodyPr rtlCol="0" anchor="ctr"/>
-          <a:lstStyle/>
-          <a:p>
-            <a:pPr algn="ctr"/>
-          </a:p>
-        </p:txBody>
-      </p:sp>
-      <p:sp>
-        <p:nvSpPr>
-          <p:cNvPr id="19" name="TextBox 18"/>
-          <p:cNvSpPr txBox="1"/>
-          <p:nvPr/>
-        </p:nvSpPr>
-        <p:spPr>
-          <a:xfrm>
-            <a:off x="804672" y="4059936"/>
-            <a:ext cx="457200" cy="384048"/>
+            <a:off x="841248" y="5266944"/>
+            <a:ext cx="457200" cy="365760"/>
           </a:xfrm>
           <a:prstGeom prst="rect">
             <a:avLst/>
@@ -6079,14 +6274,14 @@
       </p:sp>
       <p:sp>
         <p:nvSpPr>
-          <p:cNvPr id="20" name="TextBox 19"/>
+          <p:cNvPr id="24" name="TextBox 23"/>
           <p:cNvSpPr txBox="1"/>
           <p:nvPr/>
         </p:nvSpPr>
         <p:spPr>
           <a:xfrm>
-            <a:off x="1371600" y="3950208"/>
-            <a:ext cx="9997135" cy="484632"/>
+            <a:off x="1508760" y="5111496"/>
+            <a:ext cx="2377440" cy="640080"/>
           </a:xfrm>
           <a:prstGeom prst="rect">
             <a:avLst/>
@@ -6099,125 +6294,31 @@
           </a:bodyPr>
           <a:lstStyle/>
           <a:p>
-            <a:pPr algn="l">
-              <a:lnSpc>
-                <a:spcPct val="110000"/>
-              </a:lnSpc>
-            </a:pPr>
+            <a:pPr algn="l"/>
             <a:r>
               <a:rPr sz="1600" b="1">
                 <a:solidFill>
-                  <a:srgbClr val="1C2A33"/>
+                  <a:srgbClr val="6B6258"/>
                 </a:solidFill>
                 <a:latin typeface="微软雅黑"/>
                 <a:ea typeface="微软雅黑"/>
                 <a:cs typeface="微软雅黑"/>
               </a:rPr>
-              <a:t>Step 4 反思单</a:t>
-            </a:r>
-          </a:p>
-        </p:txBody>
-      </p:sp>
-      <p:sp>
-        <p:nvSpPr>
-          <p:cNvPr id="21" name="Rounded Rectangle 20"/>
-          <p:cNvSpPr/>
-          <p:nvPr/>
-        </p:nvSpPr>
-        <p:spPr>
-          <a:xfrm>
-            <a:off x="640080" y="4663440"/>
-            <a:ext cx="10911535" cy="685800"/>
-          </a:xfrm>
-          <a:prstGeom prst="roundRect">
-            <a:avLst/>
-          </a:prstGeom>
-          <a:solidFill>
-            <a:srgbClr val="FFFFFF"/>
-          </a:solidFill>
-          <a:ln w="22860">
-            <a:solidFill>
-              <a:srgbClr val="2E7D6B"/>
-            </a:solidFill>
-          </a:ln>
-          <a:effectLst/>
-        </p:spPr>
-        <p:style>
-          <a:lnRef idx="1">
-            <a:schemeClr val="accent1"/>
-          </a:lnRef>
-          <a:fillRef idx="3">
-            <a:schemeClr val="accent1"/>
-          </a:fillRef>
-          <a:effectRef idx="2">
-            <a:schemeClr val="accent1"/>
-          </a:effectRef>
-          <a:fontRef idx="minor">
-            <a:schemeClr val="lt1"/>
-          </a:fontRef>
-        </p:style>
-        <p:txBody>
-          <a:bodyPr rtlCol="0" anchor="ctr"/>
-          <a:lstStyle/>
-          <a:p>
-            <a:pPr algn="ctr"/>
-          </a:p>
-        </p:txBody>
-      </p:sp>
-      <p:sp>
-        <p:nvSpPr>
-          <p:cNvPr id="22" name="Oval 21"/>
-          <p:cNvSpPr/>
-          <p:nvPr/>
-        </p:nvSpPr>
-        <p:spPr>
-          <a:xfrm>
-            <a:off x="804672" y="4828032"/>
-            <a:ext cx="457200" cy="457200"/>
-          </a:xfrm>
-          <a:prstGeom prst="ellipse">
-            <a:avLst/>
-          </a:prstGeom>
-          <a:solidFill>
-            <a:srgbClr val="2E7D6B"/>
-          </a:solidFill>
-          <a:ln>
-            <a:noFill/>
-          </a:ln>
-          <a:effectLst/>
-        </p:spPr>
-        <p:style>
-          <a:lnRef idx="1">
-            <a:schemeClr val="accent1"/>
-          </a:lnRef>
-          <a:fillRef idx="3">
-            <a:schemeClr val="accent1"/>
-          </a:fillRef>
-          <a:effectRef idx="2">
-            <a:schemeClr val="accent1"/>
-          </a:effectRef>
-          <a:fontRef idx="minor">
-            <a:schemeClr val="lt1"/>
-          </a:fontRef>
-        </p:style>
-        <p:txBody>
-          <a:bodyPr rtlCol="0" anchor="ctr"/>
-          <a:lstStyle/>
-          <a:p>
-            <a:pPr algn="ctr"/>
-          </a:p>
-        </p:txBody>
-      </p:sp>
-      <p:sp>
-        <p:nvSpPr>
-          <p:cNvPr id="23" name="TextBox 22"/>
+              <a:t>总结法</a:t>
+            </a:r>
+          </a:p>
+        </p:txBody>
+      </p:sp>
+      <p:sp>
+        <p:nvSpPr>
+          <p:cNvPr id="25" name="TextBox 24"/>
           <p:cNvSpPr txBox="1"/>
           <p:nvPr/>
         </p:nvSpPr>
         <p:spPr>
           <a:xfrm>
-            <a:off x="804672" y="4882896"/>
-            <a:ext cx="457200" cy="384048"/>
+            <a:off x="3931920" y="5111496"/>
+            <a:ext cx="7436815" cy="640080"/>
           </a:xfrm>
           <a:prstGeom prst="rect">
             <a:avLst/>
@@ -6230,65 +6331,28 @@
           </a:bodyPr>
           <a:lstStyle/>
           <a:p>
-            <a:pPr algn="ctr"/>
-            <a:r>
-              <a:rPr sz="1600" b="1">
-                <a:solidFill>
-                  <a:srgbClr val="FFFFFF"/>
-                </a:solidFill>
-                <a:latin typeface="微软雅黑"/>
-                <a:ea typeface="微软雅黑"/>
-                <a:cs typeface="微软雅黑"/>
-              </a:rPr>
-              <a:t>5</a:t>
-            </a:r>
-          </a:p>
-        </p:txBody>
-      </p:sp>
-      <p:sp>
-        <p:nvSpPr>
-          <p:cNvPr id="24" name="TextBox 23"/>
-          <p:cNvSpPr txBox="1"/>
-          <p:nvPr/>
-        </p:nvSpPr>
-        <p:spPr>
-          <a:xfrm>
-            <a:off x="1371600" y="4773168"/>
-            <a:ext cx="9997135" cy="484632"/>
-          </a:xfrm>
-          <a:prstGeom prst="rect">
-            <a:avLst/>
-          </a:prstGeom>
-          <a:noFill/>
-        </p:spPr>
-        <p:txBody>
-          <a:bodyPr wrap="square" anchor="t" lIns="0" rIns="0" tIns="0" bIns="0">
-            <a:spAutoFit/>
-          </a:bodyPr>
-          <a:lstStyle/>
-          <a:p>
             <a:pPr algn="l">
               <a:lnSpc>
-                <a:spcPct val="110000"/>
+                <a:spcPct val="130000"/>
               </a:lnSpc>
             </a:pPr>
             <a:r>
-              <a:rPr sz="1600" b="1">
+              <a:rPr sz="1400" b="0">
                 <a:solidFill>
                   <a:srgbClr val="1C2A33"/>
                 </a:solidFill>
-                <a:latin typeface="微软雅黑"/>
-                <a:ea typeface="微软雅黑"/>
-                <a:cs typeface="微软雅黑"/>
+                <a:latin typeface="楷体"/>
+                <a:ea typeface="楷体"/>
+                <a:cs typeface="楷体"/>
               </a:rPr>
-              <a:t>Step 5 总结</a:t>
-            </a:r>
-          </a:p>
-        </p:txBody>
-      </p:sp>
-      <p:sp>
-        <p:nvSpPr>
-          <p:cNvPr id="25" name="TextBox 24"/>
+              <a:t>点明文化参与意义。</a:t>
+            </a:r>
+          </a:p>
+        </p:txBody>
+      </p:sp>
+      <p:sp>
+        <p:nvSpPr>
+          <p:cNvPr id="26" name="TextBox 25"/>
           <p:cNvSpPr txBox="1"/>
           <p:nvPr/>
         </p:nvSpPr>
@@ -6421,7 +6485,7 @@
                 <a:ea typeface="微软雅黑"/>
                 <a:cs typeface="微软雅黑"/>
               </a:rPr>
-              <a:t>易混易错</a:t>
+              <a:t>难点</a:t>
             </a:r>
           </a:p>
         </p:txBody>
@@ -6472,14 +6536,51 @@
       </p:sp>
       <p:sp>
         <p:nvSpPr>
-          <p:cNvPr id="5" name="Rounded Rectangle 4"/>
+          <p:cNvPr id="5" name="TextBox 4"/>
+          <p:cNvSpPr txBox="1"/>
+          <p:nvPr/>
+        </p:nvSpPr>
+        <p:spPr>
+          <a:xfrm>
+            <a:off x="640080" y="1280160"/>
+            <a:ext cx="10058400" cy="548640"/>
+          </a:xfrm>
+          <a:prstGeom prst="rect">
+            <a:avLst/>
+          </a:prstGeom>
+          <a:noFill/>
+        </p:spPr>
+        <p:txBody>
+          <a:bodyPr wrap="square" anchor="t" lIns="0" rIns="0" tIns="0" bIns="0">
+            <a:spAutoFit/>
+          </a:bodyPr>
+          <a:lstStyle/>
+          <a:p>
+            <a:pPr algn="l"/>
+            <a:r>
+              <a:rPr sz="2800" b="1">
+                <a:solidFill>
+                  <a:srgbClr val="1C2A33"/>
+                </a:solidFill>
+                <a:latin typeface="楷体"/>
+                <a:ea typeface="楷体"/>
+                <a:cs typeface="楷体"/>
+              </a:rPr>
+              <a:t>怎么破</a:t>
+            </a:r>
+          </a:p>
+        </p:txBody>
+      </p:sp>
+      <p:sp>
+        <p:nvSpPr>
+          <p:cNvPr id="6" name="Rounded Rectangle 5"/>
           <p:cNvSpPr/>
           <p:nvPr/>
         </p:nvSpPr>
         <p:spPr>
           <a:xfrm>
-            <a:off x="640080" y="1417320"/>
-            <a:ext cx="5349240" cy="2057400"/>
+            <a:off x="640080" y="1920240"/>
+            <a:ext cx="10911535" cy="868680"/>
           </a:xfrm>
           <a:prstGeom prst="roundRect">
             <a:avLst/>
@@ -6487,7 +6588,7 @@
           <a:solidFill>
             <a:srgbClr val="FFFFFF"/>
           </a:solidFill>
-          <a:ln w="22860">
+          <a:ln w="20320">
             <a:solidFill>
               <a:srgbClr val="B23A2A"/>
             </a:solidFill>
@@ -6518,13 +6619,13 @@
       </p:sp>
       <p:sp>
         <p:nvSpPr>
-          <p:cNvPr id="6" name="Oval 5"/>
+          <p:cNvPr id="7" name="Oval 6"/>
           <p:cNvSpPr/>
           <p:nvPr/>
         </p:nvSpPr>
         <p:spPr>
           <a:xfrm>
-            <a:off x="804672" y="1581912"/>
+            <a:off x="841248" y="2121408"/>
             <a:ext cx="457200" cy="457200"/>
           </a:xfrm>
           <a:prstGeom prst="ellipse">
@@ -6562,14 +6663,14 @@
       </p:sp>
       <p:sp>
         <p:nvSpPr>
-          <p:cNvPr id="7" name="TextBox 6"/>
+          <p:cNvPr id="8" name="TextBox 7"/>
           <p:cNvSpPr txBox="1"/>
           <p:nvPr/>
         </p:nvSpPr>
         <p:spPr>
           <a:xfrm>
-            <a:off x="804672" y="1636776"/>
-            <a:ext cx="457200" cy="384048"/>
+            <a:off x="841248" y="2194560"/>
+            <a:ext cx="457200" cy="365760"/>
           </a:xfrm>
           <a:prstGeom prst="rect">
             <a:avLst/>
@@ -6592,21 +6693,21 @@
                 <a:ea typeface="微软雅黑"/>
                 <a:cs typeface="微软雅黑"/>
               </a:rPr>
-              <a:t>!</a:t>
-            </a:r>
-          </a:p>
-        </p:txBody>
-      </p:sp>
-      <p:sp>
-        <p:nvSpPr>
-          <p:cNvPr id="8" name="TextBox 7"/>
+              <a:t>1</a:t>
+            </a:r>
+          </a:p>
+        </p:txBody>
+      </p:sp>
+      <p:sp>
+        <p:nvSpPr>
+          <p:cNvPr id="9" name="TextBox 8"/>
           <p:cNvSpPr txBox="1"/>
           <p:nvPr/>
         </p:nvSpPr>
         <p:spPr>
           <a:xfrm>
-            <a:off x="1371600" y="1527048"/>
-            <a:ext cx="4434840" cy="457200"/>
+            <a:off x="1508760" y="2029968"/>
+            <a:ext cx="9814255" cy="658368"/>
           </a:xfrm>
           <a:prstGeom prst="rect">
             <a:avLst/>
@@ -6621,52 +6722,11 @@
           <a:p>
             <a:pPr algn="l">
               <a:lnSpc>
-                <a:spcPct val="110000"/>
+                <a:spcPct val="130000"/>
               </a:lnSpc>
             </a:pPr>
             <a:r>
-              <a:rPr sz="1600" b="1">
-                <a:solidFill>
-                  <a:srgbClr val="1C2A33"/>
-                </a:solidFill>
-                <a:latin typeface="微软雅黑"/>
-                <a:ea typeface="微软雅黑"/>
-                <a:cs typeface="微软雅黑"/>
-              </a:rPr>
-              <a:t/>
-            </a:r>
-          </a:p>
-        </p:txBody>
-      </p:sp>
-      <p:sp>
-        <p:nvSpPr>
-          <p:cNvPr id="9" name="TextBox 8"/>
-          <p:cNvSpPr txBox="1"/>
-          <p:nvPr/>
-        </p:nvSpPr>
-        <p:spPr>
-          <a:xfrm>
-            <a:off x="1371600" y="1965960"/>
-            <a:ext cx="4434840" cy="1417320"/>
-          </a:xfrm>
-          <a:prstGeom prst="rect">
-            <a:avLst/>
-          </a:prstGeom>
-          <a:noFill/>
-        </p:spPr>
-        <p:txBody>
-          <a:bodyPr wrap="square" anchor="t" lIns="0" rIns="0" tIns="0" bIns="0">
-            <a:spAutoFit/>
-          </a:bodyPr>
-          <a:lstStyle/>
-          <a:p>
-            <a:pPr algn="l">
-              <a:lnSpc>
-                <a:spcPct val="128000"/>
-              </a:lnSpc>
-            </a:pPr>
-            <a:r>
-              <a:rPr sz="1400" b="0">
+              <a:rPr sz="1350" b="0">
                 <a:solidFill>
                   <a:srgbClr val="1C2A33"/>
                 </a:solidFill>
@@ -6674,7 +6734,7 @@
                 <a:ea typeface="楷体"/>
                 <a:cs typeface="楷体"/>
               </a:rPr>
-              <a:t>① 分享条理。原因：学生易念稿无重点，需给「三句话框架」。</a:t>
+              <a:t>分享条理。原因：你易念稿无重点，需给「三句话框架」。</a:t>
             </a:r>
           </a:p>
         </p:txBody>
@@ -6687,8 +6747,8 @@
         </p:nvSpPr>
         <p:spPr>
           <a:xfrm>
-            <a:off x="6263640" y="1417320"/>
-            <a:ext cx="5349240" cy="2057400"/>
+            <a:off x="640080" y="2944368"/>
+            <a:ext cx="10911535" cy="868680"/>
           </a:xfrm>
           <a:prstGeom prst="roundRect">
             <a:avLst/>
@@ -6696,9 +6756,9 @@
           <a:solidFill>
             <a:srgbClr val="FFFFFF"/>
           </a:solidFill>
-          <a:ln w="22860">
+          <a:ln w="20320">
             <a:solidFill>
-              <a:srgbClr val="B23A2A"/>
+              <a:srgbClr val="2E7D6B"/>
             </a:solidFill>
           </a:ln>
           <a:effectLst/>
@@ -6733,14 +6793,14 @@
         </p:nvSpPr>
         <p:spPr>
           <a:xfrm>
-            <a:off x="6428232" y="1581912"/>
+            <a:off x="841248" y="3145536"/>
             <a:ext cx="457200" cy="457200"/>
           </a:xfrm>
           <a:prstGeom prst="ellipse">
             <a:avLst/>
           </a:prstGeom>
           <a:solidFill>
-            <a:srgbClr val="B23A2A"/>
+            <a:srgbClr val="2E7D6B"/>
           </a:solidFill>
           <a:ln>
             <a:noFill/>
@@ -6777,8 +6837,8 @@
         </p:nvSpPr>
         <p:spPr>
           <a:xfrm>
-            <a:off x="6428232" y="1636776"/>
-            <a:ext cx="457200" cy="384048"/>
+            <a:off x="841248" y="3218688"/>
+            <a:ext cx="457200" cy="365760"/>
           </a:xfrm>
           <a:prstGeom prst="rect">
             <a:avLst/>
@@ -6801,7 +6861,7 @@
                 <a:ea typeface="微软雅黑"/>
                 <a:cs typeface="微软雅黑"/>
               </a:rPr>
-              <a:t>!</a:t>
+              <a:t>2</a:t>
             </a:r>
           </a:p>
         </p:txBody>
@@ -6814,8 +6874,8 @@
         </p:nvSpPr>
         <p:spPr>
           <a:xfrm>
-            <a:off x="6995160" y="1527048"/>
-            <a:ext cx="4434840" cy="457200"/>
+            <a:off x="1508760" y="3054096"/>
+            <a:ext cx="9814255" cy="658368"/>
           </a:xfrm>
           <a:prstGeom prst="rect">
             <a:avLst/>
@@ -6830,52 +6890,11 @@
           <a:p>
             <a:pPr algn="l">
               <a:lnSpc>
-                <a:spcPct val="110000"/>
+                <a:spcPct val="130000"/>
               </a:lnSpc>
             </a:pPr>
             <a:r>
-              <a:rPr sz="1600" b="1">
-                <a:solidFill>
-                  <a:srgbClr val="1C2A33"/>
-                </a:solidFill>
-                <a:latin typeface="微软雅黑"/>
-                <a:ea typeface="微软雅黑"/>
-                <a:cs typeface="微软雅黑"/>
-              </a:rPr>
-              <a:t/>
-            </a:r>
-          </a:p>
-        </p:txBody>
-      </p:sp>
-      <p:sp>
-        <p:nvSpPr>
-          <p:cNvPr id="14" name="TextBox 13"/>
-          <p:cNvSpPr txBox="1"/>
-          <p:nvPr/>
-        </p:nvSpPr>
-        <p:spPr>
-          <a:xfrm>
-            <a:off x="6995160" y="1965960"/>
-            <a:ext cx="4434840" cy="1417320"/>
-          </a:xfrm>
-          <a:prstGeom prst="rect">
-            <a:avLst/>
-          </a:prstGeom>
-          <a:noFill/>
-        </p:spPr>
-        <p:txBody>
-          <a:bodyPr wrap="square" anchor="t" lIns="0" rIns="0" tIns="0" bIns="0">
-            <a:spAutoFit/>
-          </a:bodyPr>
-          <a:lstStyle/>
-          <a:p>
-            <a:pPr algn="l">
-              <a:lnSpc>
-                <a:spcPct val="128000"/>
-              </a:lnSpc>
-            </a:pPr>
-            <a:r>
-              <a:rPr sz="1400" b="0">
+              <a:rPr sz="1350" b="0">
                 <a:solidFill>
                   <a:srgbClr val="1C2A33"/>
                 </a:solidFill>
@@ -6883,21 +6902,21 @@
                 <a:ea typeface="楷体"/>
                 <a:cs typeface="楷体"/>
               </a:rPr>
-              <a:t>② 参与感深化。原因：部分觉得「写完了事」，需点明行动延续。</a:t>
-            </a:r>
-          </a:p>
-        </p:txBody>
-      </p:sp>
-      <p:sp>
-        <p:nvSpPr>
-          <p:cNvPr id="15" name="Rounded Rectangle 14"/>
+              <a:t>参与感深化。原因：部分觉得「写完了事」，需点明行动延续。</a:t>
+            </a:r>
+          </a:p>
+        </p:txBody>
+      </p:sp>
+      <p:sp>
+        <p:nvSpPr>
+          <p:cNvPr id="14" name="Rounded Rectangle 13"/>
           <p:cNvSpPr/>
           <p:nvPr/>
         </p:nvSpPr>
         <p:spPr>
           <a:xfrm>
-            <a:off x="640080" y="3703320"/>
-            <a:ext cx="5349240" cy="2057400"/>
+            <a:off x="640080" y="3968496"/>
+            <a:ext cx="10911535" cy="868680"/>
           </a:xfrm>
           <a:prstGeom prst="roundRect">
             <a:avLst/>
@@ -6905,9 +6924,9 @@
           <a:solidFill>
             <a:srgbClr val="FFFFFF"/>
           </a:solidFill>
-          <a:ln w="22860">
+          <a:ln w="20320">
             <a:solidFill>
-              <a:srgbClr val="B23A2A"/>
+              <a:srgbClr val="C8A86B"/>
             </a:solidFill>
           </a:ln>
           <a:effectLst/>
@@ -6936,20 +6955,20 @@
       </p:sp>
       <p:sp>
         <p:nvSpPr>
-          <p:cNvPr id="16" name="Oval 15"/>
+          <p:cNvPr id="15" name="Oval 14"/>
           <p:cNvSpPr/>
           <p:nvPr/>
         </p:nvSpPr>
         <p:spPr>
           <a:xfrm>
-            <a:off x="804672" y="3867912"/>
+            <a:off x="841248" y="4169664"/>
             <a:ext cx="457200" cy="457200"/>
           </a:xfrm>
           <a:prstGeom prst="ellipse">
             <a:avLst/>
           </a:prstGeom>
           <a:solidFill>
-            <a:srgbClr val="B23A2A"/>
+            <a:srgbClr val="C8A86B"/>
           </a:solidFill>
           <a:ln>
             <a:noFill/>
@@ -6980,14 +6999,14 @@
       </p:sp>
       <p:sp>
         <p:nvSpPr>
-          <p:cNvPr id="17" name="TextBox 16"/>
+          <p:cNvPr id="16" name="TextBox 15"/>
           <p:cNvSpPr txBox="1"/>
           <p:nvPr/>
         </p:nvSpPr>
         <p:spPr>
           <a:xfrm>
-            <a:off x="804672" y="3922776"/>
-            <a:ext cx="457200" cy="384048"/>
+            <a:off x="841248" y="4242816"/>
+            <a:ext cx="457200" cy="365760"/>
           </a:xfrm>
           <a:prstGeom prst="rect">
             <a:avLst/>
@@ -7010,21 +7029,21 @@
                 <a:ea typeface="微软雅黑"/>
                 <a:cs typeface="微软雅黑"/>
               </a:rPr>
-              <a:t>!</a:t>
-            </a:r>
-          </a:p>
-        </p:txBody>
-      </p:sp>
-      <p:sp>
-        <p:nvSpPr>
-          <p:cNvPr id="18" name="TextBox 17"/>
+              <a:t>3</a:t>
+            </a:r>
+          </a:p>
+        </p:txBody>
+      </p:sp>
+      <p:sp>
+        <p:nvSpPr>
+          <p:cNvPr id="17" name="TextBox 16"/>
           <p:cNvSpPr txBox="1"/>
           <p:nvPr/>
         </p:nvSpPr>
         <p:spPr>
           <a:xfrm>
-            <a:off x="1371600" y="3813048"/>
-            <a:ext cx="4434840" cy="457200"/>
+            <a:off x="1508760" y="4078224"/>
+            <a:ext cx="9814255" cy="658368"/>
           </a:xfrm>
           <a:prstGeom prst="rect">
             <a:avLst/>
@@ -7039,52 +7058,11 @@
           <a:p>
             <a:pPr algn="l">
               <a:lnSpc>
-                <a:spcPct val="110000"/>
+                <a:spcPct val="130000"/>
               </a:lnSpc>
             </a:pPr>
             <a:r>
-              <a:rPr sz="1600" b="1">
-                <a:solidFill>
-                  <a:srgbClr val="1C2A33"/>
-                </a:solidFill>
-                <a:latin typeface="微软雅黑"/>
-                <a:ea typeface="微软雅黑"/>
-                <a:cs typeface="微软雅黑"/>
-              </a:rPr>
-              <a:t/>
-            </a:r>
-          </a:p>
-        </p:txBody>
-      </p:sp>
-      <p:sp>
-        <p:nvSpPr>
-          <p:cNvPr id="19" name="TextBox 18"/>
-          <p:cNvSpPr txBox="1"/>
-          <p:nvPr/>
-        </p:nvSpPr>
-        <p:spPr>
-          <a:xfrm>
-            <a:off x="1371600" y="4251960"/>
-            <a:ext cx="4434840" cy="1417320"/>
-          </a:xfrm>
-          <a:prstGeom prst="rect">
-            <a:avLst/>
-          </a:prstGeom>
-          <a:noFill/>
-        </p:spPr>
-        <p:txBody>
-          <a:bodyPr wrap="square" anchor="t" lIns="0" rIns="0" tIns="0" bIns="0">
-            <a:spAutoFit/>
-          </a:bodyPr>
-          <a:lstStyle/>
-          <a:p>
-            <a:pPr algn="l">
-              <a:lnSpc>
-                <a:spcPct val="128000"/>
-              </a:lnSpc>
-            </a:pPr>
-            <a:r>
-              <a:rPr sz="1400" b="0">
+              <a:rPr sz="1350" b="0">
                 <a:solidFill>
                   <a:srgbClr val="1C2A33"/>
                 </a:solidFill>
@@ -7092,14 +7070,14 @@
                 <a:ea typeface="楷体"/>
                 <a:cs typeface="楷体"/>
               </a:rPr>
-              <a:t>③ 反思深度。原因：习惯空话，需具体提示。</a:t>
-            </a:r>
-          </a:p>
-        </p:txBody>
-      </p:sp>
-      <p:sp>
-        <p:nvSpPr>
-          <p:cNvPr id="20" name="TextBox 19"/>
+              <a:t>反思深度。原因：习惯空话，需具体提示。</a:t>
+            </a:r>
+          </a:p>
+        </p:txBody>
+      </p:sp>
+      <p:sp>
+        <p:nvSpPr>
+          <p:cNvPr id="18" name="TextBox 17"/>
           <p:cNvSpPr txBox="1"/>
           <p:nvPr/>
         </p:nvSpPr>
@@ -7226,13 +7204,13 @@
             <a:r>
               <a:rPr sz="1300" b="1">
                 <a:solidFill>
-                  <a:srgbClr val="C8A86B"/>
+                  <a:srgbClr val="B23A2A"/>
                 </a:solidFill>
                 <a:latin typeface="微软雅黑"/>
                 <a:ea typeface="微软雅黑"/>
                 <a:cs typeface="微软雅黑"/>
               </a:rPr>
-              <a:t>要点板书</a:t>
+              <a:t>板书精华</a:t>
             </a:r>
           </a:p>
         </p:txBody>
@@ -7252,7 +7230,7 @@
             <a:avLst/>
           </a:prstGeom>
           <a:solidFill>
-            <a:srgbClr val="C8A86B"/>
+            <a:srgbClr val="B23A2A"/>
           </a:solidFill>
           <a:ln>
             <a:noFill/>
@@ -7283,14 +7261,51 @@
       </p:sp>
       <p:sp>
         <p:nvSpPr>
-          <p:cNvPr id="5" name="Rounded Rectangle 4"/>
+          <p:cNvPr id="5" name="TextBox 4"/>
+          <p:cNvSpPr txBox="1"/>
+          <p:nvPr/>
+        </p:nvSpPr>
+        <p:spPr>
+          <a:xfrm>
+            <a:off x="640080" y="1280160"/>
+            <a:ext cx="10058400" cy="548640"/>
+          </a:xfrm>
+          <a:prstGeom prst="rect">
+            <a:avLst/>
+          </a:prstGeom>
+          <a:noFill/>
+        </p:spPr>
+        <p:txBody>
+          <a:bodyPr wrap="square" anchor="t" lIns="0" rIns="0" tIns="0" bIns="0">
+            <a:spAutoFit/>
+          </a:bodyPr>
+          <a:lstStyle/>
+          <a:p>
+            <a:pPr algn="l"/>
+            <a:r>
+              <a:rPr sz="2600" b="1">
+                <a:solidFill>
+                  <a:srgbClr val="1C2A33"/>
+                </a:solidFill>
+                <a:latin typeface="楷体"/>
+                <a:ea typeface="楷体"/>
+                <a:cs typeface="楷体"/>
+              </a:rPr>
+              <a:t>家乡文化分享会</a:t>
+            </a:r>
+          </a:p>
+        </p:txBody>
+      </p:sp>
+      <p:sp>
+        <p:nvSpPr>
+          <p:cNvPr id="6" name="Rounded Rectangle 5"/>
           <p:cNvSpPr/>
           <p:nvPr/>
         </p:nvSpPr>
         <p:spPr>
           <a:xfrm>
-            <a:off x="640080" y="1417320"/>
-            <a:ext cx="10911535" cy="5394960"/>
+            <a:off x="640080" y="1783080"/>
+            <a:ext cx="10911535" cy="4526280"/>
           </a:xfrm>
           <a:prstGeom prst="roundRect">
             <a:avLst/>
@@ -7298,9 +7313,9 @@
           <a:solidFill>
             <a:srgbClr val="FFFFFF"/>
           </a:solidFill>
-          <a:ln w="25400">
+          <a:ln w="12700">
             <a:solidFill>
-              <a:srgbClr val="C8A86B"/>
+              <a:srgbClr val="6B6258"/>
             </a:solidFill>
           </a:ln>
           <a:effectLst/>
@@ -7329,14 +7344,14 @@
       </p:sp>
       <p:sp>
         <p:nvSpPr>
-          <p:cNvPr id="6" name="TextBox 5"/>
+          <p:cNvPr id="7" name="TextBox 6"/>
           <p:cNvSpPr txBox="1"/>
           <p:nvPr/>
         </p:nvSpPr>
         <p:spPr>
           <a:xfrm>
-            <a:off x="914400" y="1554480"/>
-            <a:ext cx="10362895" cy="5120640"/>
+            <a:off x="960120" y="2011680"/>
+            <a:ext cx="10271455" cy="4069080"/>
           </a:xfrm>
           <a:prstGeom prst="rect">
             <a:avLst/>
@@ -7350,49 +7365,321 @@
           <a:lstStyle/>
           <a:p>
             <a:pPr algn="l">
-              <a:lnSpc>
-                <a:spcPct val="110000"/>
-              </a:lnSpc>
               <a:spcAft>
-                <a:spcPts val="100"/>
+                <a:spcPts val="600"/>
               </a:spcAft>
             </a:pPr>
             <a:r>
-              <a:rPr sz="1300" b="0">
-                <a:solidFill>
-                  <a:srgbClr val="1C2A33"/>
+              <a:rPr sz="1600" b="1">
+                <a:solidFill>
+                  <a:srgbClr val="B23A2A"/>
                 </a:solidFill>
                 <a:latin typeface="微软雅黑"/>
                 <a:ea typeface="微软雅黑"/>
                 <a:cs typeface="微软雅黑"/>
               </a:rPr>
-              <a:t>┌── 家乡文化分享会 ──┐
-│ 成果展:卡墙+倡议 │
-│ │
-│ 【三句话框架】 │
-│ 做了/发现了/ │
-│ 倡议了 │
-│ │
-│ 【单元路径】 │
-│ 调查(方法)→ │
-│ 撰写(成文)→ │
-│ 倡议(行动) │
-│ │
-│ 【反思三问】 │
-│ ①我学会了__ │
-│ ②我需提升__ │
-│ ③我的疑问__ │
-│ │
-│ 看→写→做 │
-│ 文化在行动 │
-└────────────────┘</a:t>
-            </a:r>
-          </a:p>
-        </p:txBody>
-      </p:sp>
-      <p:sp>
-        <p:nvSpPr>
-          <p:cNvPr id="7" name="TextBox 6"/>
+              <a:t>家乡文化分享会</a:t>
+            </a:r>
+          </a:p>
+          <a:p>
+            <a:pPr algn="l">
+              <a:lnSpc>
+                <a:spcPct val="115000"/>
+              </a:lnSpc>
+              <a:spcAft>
+                <a:spcPts val="0"/>
+              </a:spcAft>
+            </a:pPr>
+            <a:r>
+              <a:rPr sz="1100" b="0">
+                <a:solidFill>
+                  <a:srgbClr val="1C2A33"/>
+                </a:solidFill>
+                <a:latin typeface="微软雅黑"/>
+                <a:ea typeface="微软雅黑"/>
+                <a:cs typeface="微软雅黑"/>
+              </a:rPr>
+              <a:t>成果展:卡墙+倡议</a:t>
+            </a:r>
+          </a:p>
+          <a:p>
+            <a:pPr algn="l">
+              <a:lnSpc>
+                <a:spcPct val="115000"/>
+              </a:lnSpc>
+              <a:spcAft>
+                <a:spcPts val="0"/>
+              </a:spcAft>
+            </a:pPr>
+            <a:r>
+              <a:rPr sz="1100" b="0">
+                <a:solidFill>
+                  <a:srgbClr val="1C2A33"/>
+                </a:solidFill>
+                <a:latin typeface="微软雅黑"/>
+                <a:ea typeface="微软雅黑"/>
+                <a:cs typeface="微软雅黑"/>
+              </a:rPr>
+              <a:t>【三句话框架】</a:t>
+            </a:r>
+          </a:p>
+          <a:p>
+            <a:pPr algn="l">
+              <a:lnSpc>
+                <a:spcPct val="115000"/>
+              </a:lnSpc>
+              <a:spcAft>
+                <a:spcPts val="0"/>
+              </a:spcAft>
+            </a:pPr>
+            <a:r>
+              <a:rPr sz="1100" b="0">
+                <a:solidFill>
+                  <a:srgbClr val="1C2A33"/>
+                </a:solidFill>
+                <a:latin typeface="微软雅黑"/>
+                <a:ea typeface="微软雅黑"/>
+                <a:cs typeface="微软雅黑"/>
+              </a:rPr>
+              <a:t>做了/发现了/</a:t>
+            </a:r>
+          </a:p>
+          <a:p>
+            <a:pPr algn="l">
+              <a:lnSpc>
+                <a:spcPct val="115000"/>
+              </a:lnSpc>
+              <a:spcAft>
+                <a:spcPts val="0"/>
+              </a:spcAft>
+            </a:pPr>
+            <a:r>
+              <a:rPr sz="1100" b="0">
+                <a:solidFill>
+                  <a:srgbClr val="1C2A33"/>
+                </a:solidFill>
+                <a:latin typeface="微软雅黑"/>
+                <a:ea typeface="微软雅黑"/>
+                <a:cs typeface="微软雅黑"/>
+              </a:rPr>
+              <a:t>倡议了</a:t>
+            </a:r>
+          </a:p>
+          <a:p>
+            <a:pPr algn="l">
+              <a:lnSpc>
+                <a:spcPct val="115000"/>
+              </a:lnSpc>
+              <a:spcAft>
+                <a:spcPts val="0"/>
+              </a:spcAft>
+            </a:pPr>
+            <a:r>
+              <a:rPr sz="1100" b="0">
+                <a:solidFill>
+                  <a:srgbClr val="1C2A33"/>
+                </a:solidFill>
+                <a:latin typeface="微软雅黑"/>
+                <a:ea typeface="微软雅黑"/>
+                <a:cs typeface="微软雅黑"/>
+              </a:rPr>
+              <a:t>【单元路径】</a:t>
+            </a:r>
+          </a:p>
+          <a:p>
+            <a:pPr algn="l">
+              <a:lnSpc>
+                <a:spcPct val="115000"/>
+              </a:lnSpc>
+              <a:spcAft>
+                <a:spcPts val="0"/>
+              </a:spcAft>
+            </a:pPr>
+            <a:r>
+              <a:rPr sz="1100" b="0">
+                <a:solidFill>
+                  <a:srgbClr val="1C2A33"/>
+                </a:solidFill>
+                <a:latin typeface="微软雅黑"/>
+                <a:ea typeface="微软雅黑"/>
+                <a:cs typeface="微软雅黑"/>
+              </a:rPr>
+              <a:t>调查(方法)→</a:t>
+            </a:r>
+          </a:p>
+          <a:p>
+            <a:pPr algn="l">
+              <a:lnSpc>
+                <a:spcPct val="115000"/>
+              </a:lnSpc>
+              <a:spcAft>
+                <a:spcPts val="0"/>
+              </a:spcAft>
+            </a:pPr>
+            <a:r>
+              <a:rPr sz="1100" b="0">
+                <a:solidFill>
+                  <a:srgbClr val="1C2A33"/>
+                </a:solidFill>
+                <a:latin typeface="微软雅黑"/>
+                <a:ea typeface="微软雅黑"/>
+                <a:cs typeface="微软雅黑"/>
+              </a:rPr>
+              <a:t>撰写(成文)→</a:t>
+            </a:r>
+          </a:p>
+          <a:p>
+            <a:pPr algn="l">
+              <a:lnSpc>
+                <a:spcPct val="115000"/>
+              </a:lnSpc>
+              <a:spcAft>
+                <a:spcPts val="0"/>
+              </a:spcAft>
+            </a:pPr>
+            <a:r>
+              <a:rPr sz="1100" b="0">
+                <a:solidFill>
+                  <a:srgbClr val="1C2A33"/>
+                </a:solidFill>
+                <a:latin typeface="微软雅黑"/>
+                <a:ea typeface="微软雅黑"/>
+                <a:cs typeface="微软雅黑"/>
+              </a:rPr>
+              <a:t>倡议(行动)</a:t>
+            </a:r>
+          </a:p>
+          <a:p>
+            <a:pPr algn="l">
+              <a:lnSpc>
+                <a:spcPct val="115000"/>
+              </a:lnSpc>
+              <a:spcAft>
+                <a:spcPts val="0"/>
+              </a:spcAft>
+            </a:pPr>
+            <a:r>
+              <a:rPr sz="1100" b="0">
+                <a:solidFill>
+                  <a:srgbClr val="1C2A33"/>
+                </a:solidFill>
+                <a:latin typeface="微软雅黑"/>
+                <a:ea typeface="微软雅黑"/>
+                <a:cs typeface="微软雅黑"/>
+              </a:rPr>
+              <a:t>【反思三问】</a:t>
+            </a:r>
+          </a:p>
+          <a:p>
+            <a:pPr algn="l">
+              <a:lnSpc>
+                <a:spcPct val="115000"/>
+              </a:lnSpc>
+              <a:spcAft>
+                <a:spcPts val="0"/>
+              </a:spcAft>
+            </a:pPr>
+            <a:r>
+              <a:rPr sz="1100" b="0">
+                <a:solidFill>
+                  <a:srgbClr val="1C2A33"/>
+                </a:solidFill>
+                <a:latin typeface="微软雅黑"/>
+                <a:ea typeface="微软雅黑"/>
+                <a:cs typeface="微软雅黑"/>
+              </a:rPr>
+              <a:t>①我学会了__</a:t>
+            </a:r>
+          </a:p>
+          <a:p>
+            <a:pPr algn="l">
+              <a:lnSpc>
+                <a:spcPct val="115000"/>
+              </a:lnSpc>
+              <a:spcAft>
+                <a:spcPts val="0"/>
+              </a:spcAft>
+            </a:pPr>
+            <a:r>
+              <a:rPr sz="1100" b="0">
+                <a:solidFill>
+                  <a:srgbClr val="1C2A33"/>
+                </a:solidFill>
+                <a:latin typeface="微软雅黑"/>
+                <a:ea typeface="微软雅黑"/>
+                <a:cs typeface="微软雅黑"/>
+              </a:rPr>
+              <a:t>②我需提升__</a:t>
+            </a:r>
+          </a:p>
+          <a:p>
+            <a:pPr algn="l">
+              <a:lnSpc>
+                <a:spcPct val="115000"/>
+              </a:lnSpc>
+              <a:spcAft>
+                <a:spcPts val="0"/>
+              </a:spcAft>
+            </a:pPr>
+            <a:r>
+              <a:rPr sz="1100" b="0">
+                <a:solidFill>
+                  <a:srgbClr val="1C2A33"/>
+                </a:solidFill>
+                <a:latin typeface="微软雅黑"/>
+                <a:ea typeface="微软雅黑"/>
+                <a:cs typeface="微软雅黑"/>
+              </a:rPr>
+              <a:t>③我的疑问__</a:t>
+            </a:r>
+          </a:p>
+          <a:p>
+            <a:pPr algn="l">
+              <a:lnSpc>
+                <a:spcPct val="115000"/>
+              </a:lnSpc>
+              <a:spcAft>
+                <a:spcPts val="0"/>
+              </a:spcAft>
+            </a:pPr>
+            <a:r>
+              <a:rPr sz="1100" b="0">
+                <a:solidFill>
+                  <a:srgbClr val="1C2A33"/>
+                </a:solidFill>
+                <a:latin typeface="微软雅黑"/>
+                <a:ea typeface="微软雅黑"/>
+                <a:cs typeface="微软雅黑"/>
+              </a:rPr>
+              <a:t>看→写→做</a:t>
+            </a:r>
+          </a:p>
+          <a:p>
+            <a:pPr algn="l">
+              <a:lnSpc>
+                <a:spcPct val="115000"/>
+              </a:lnSpc>
+              <a:spcAft>
+                <a:spcPts val="0"/>
+              </a:spcAft>
+            </a:pPr>
+            <a:r>
+              <a:rPr sz="1100" b="0">
+                <a:solidFill>
+                  <a:srgbClr val="1C2A33"/>
+                </a:solidFill>
+                <a:latin typeface="微软雅黑"/>
+                <a:ea typeface="微软雅黑"/>
+                <a:cs typeface="微软雅黑"/>
+              </a:rPr>
+              <a:t>文化在行动</a:t>
+            </a:r>
+          </a:p>
+        </p:txBody>
+      </p:sp>
+      <p:sp>
+        <p:nvSpPr>
+          <p:cNvPr id="8" name="TextBox 7"/>
           <p:cNvSpPr txBox="1"/>
           <p:nvPr/>
         </p:nvSpPr>
@@ -7519,13 +7806,13 @@
             <a:r>
               <a:rPr sz="1300" b="1">
                 <a:solidFill>
-                  <a:srgbClr val="2E7D6B"/>
+                  <a:srgbClr val="B23A2A"/>
                 </a:solidFill>
                 <a:latin typeface="微软雅黑"/>
                 <a:ea typeface="微软雅黑"/>
                 <a:cs typeface="微软雅黑"/>
               </a:rPr>
-              <a:t>分层作业</a:t>
+              <a:t>作业</a:t>
             </a:r>
           </a:p>
         </p:txBody>
@@ -7540,6 +7827,301 @@
           <a:xfrm>
             <a:off x="640080" y="1097280"/>
             <a:ext cx="822960" cy="30480"/>
+          </a:xfrm>
+          <a:prstGeom prst="rect">
+            <a:avLst/>
+          </a:prstGeom>
+          <a:solidFill>
+            <a:srgbClr val="B23A2A"/>
+          </a:solidFill>
+          <a:ln>
+            <a:noFill/>
+          </a:ln>
+          <a:effectLst/>
+        </p:spPr>
+        <p:style>
+          <a:lnRef idx="1">
+            <a:schemeClr val="accent1"/>
+          </a:lnRef>
+          <a:fillRef idx="3">
+            <a:schemeClr val="accent1"/>
+          </a:fillRef>
+          <a:effectRef idx="2">
+            <a:schemeClr val="accent1"/>
+          </a:effectRef>
+          <a:fontRef idx="minor">
+            <a:schemeClr val="lt1"/>
+          </a:fontRef>
+        </p:style>
+        <p:txBody>
+          <a:bodyPr rtlCol="0" anchor="ctr"/>
+          <a:lstStyle/>
+          <a:p>
+            <a:pPr algn="ctr"/>
+          </a:p>
+        </p:txBody>
+      </p:sp>
+      <p:sp>
+        <p:nvSpPr>
+          <p:cNvPr id="5" name="TextBox 4"/>
+          <p:cNvSpPr txBox="1"/>
+          <p:nvPr/>
+        </p:nvSpPr>
+        <p:spPr>
+          <a:xfrm>
+            <a:off x="640080" y="1280160"/>
+            <a:ext cx="10058400" cy="548640"/>
+          </a:xfrm>
+          <a:prstGeom prst="rect">
+            <a:avLst/>
+          </a:prstGeom>
+          <a:noFill/>
+        </p:spPr>
+        <p:txBody>
+          <a:bodyPr wrap="square" anchor="t" lIns="0" rIns="0" tIns="0" bIns="0">
+            <a:spAutoFit/>
+          </a:bodyPr>
+          <a:lstStyle/>
+          <a:p>
+            <a:pPr algn="l"/>
+            <a:r>
+              <a:rPr sz="2800" b="1">
+                <a:solidFill>
+                  <a:srgbClr val="1C2A33"/>
+                </a:solidFill>
+                <a:latin typeface="楷体"/>
+                <a:ea typeface="楷体"/>
+                <a:cs typeface="楷体"/>
+              </a:rPr>
+              <a:t>分层任务</a:t>
+            </a:r>
+          </a:p>
+        </p:txBody>
+      </p:sp>
+      <p:sp>
+        <p:nvSpPr>
+          <p:cNvPr id="6" name="Rounded Rectangle 5"/>
+          <p:cNvSpPr/>
+          <p:nvPr/>
+        </p:nvSpPr>
+        <p:spPr>
+          <a:xfrm>
+            <a:off x="640080" y="2011680"/>
+            <a:ext cx="5272887" cy="3931920"/>
+          </a:xfrm>
+          <a:prstGeom prst="roundRect">
+            <a:avLst/>
+          </a:prstGeom>
+          <a:solidFill>
+            <a:srgbClr val="FFFFFF"/>
+          </a:solidFill>
+          <a:ln w="20320">
+            <a:solidFill>
+              <a:srgbClr val="B23A2A"/>
+            </a:solidFill>
+          </a:ln>
+          <a:effectLst/>
+        </p:spPr>
+        <p:style>
+          <a:lnRef idx="1">
+            <a:schemeClr val="accent1"/>
+          </a:lnRef>
+          <a:fillRef idx="3">
+            <a:schemeClr val="accent1"/>
+          </a:fillRef>
+          <a:effectRef idx="2">
+            <a:schemeClr val="accent1"/>
+          </a:effectRef>
+          <a:fontRef idx="minor">
+            <a:schemeClr val="lt1"/>
+          </a:fontRef>
+        </p:style>
+        <p:txBody>
+          <a:bodyPr rtlCol="0" anchor="ctr"/>
+          <a:lstStyle/>
+          <a:p>
+            <a:pPr algn="ctr"/>
+          </a:p>
+        </p:txBody>
+      </p:sp>
+      <p:sp>
+        <p:nvSpPr>
+          <p:cNvPr id="7" name="Rectangle 6"/>
+          <p:cNvSpPr/>
+          <p:nvPr/>
+        </p:nvSpPr>
+        <p:spPr>
+          <a:xfrm>
+            <a:off x="640080" y="2011680"/>
+            <a:ext cx="5272887" cy="548640"/>
+          </a:xfrm>
+          <a:prstGeom prst="rect">
+            <a:avLst/>
+          </a:prstGeom>
+          <a:solidFill>
+            <a:srgbClr val="B23A2A"/>
+          </a:solidFill>
+          <a:ln>
+            <a:noFill/>
+          </a:ln>
+          <a:effectLst/>
+        </p:spPr>
+        <p:style>
+          <a:lnRef idx="1">
+            <a:schemeClr val="accent1"/>
+          </a:lnRef>
+          <a:fillRef idx="3">
+            <a:schemeClr val="accent1"/>
+          </a:fillRef>
+          <a:effectRef idx="2">
+            <a:schemeClr val="accent1"/>
+          </a:effectRef>
+          <a:fontRef idx="minor">
+            <a:schemeClr val="lt1"/>
+          </a:fontRef>
+        </p:style>
+        <p:txBody>
+          <a:bodyPr rtlCol="0" anchor="ctr"/>
+          <a:lstStyle/>
+          <a:p>
+            <a:pPr algn="ctr"/>
+          </a:p>
+        </p:txBody>
+      </p:sp>
+      <p:sp>
+        <p:nvSpPr>
+          <p:cNvPr id="8" name="TextBox 7"/>
+          <p:cNvSpPr txBox="1"/>
+          <p:nvPr/>
+        </p:nvSpPr>
+        <p:spPr>
+          <a:xfrm>
+            <a:off x="640080" y="2103120"/>
+            <a:ext cx="5272887" cy="365760"/>
+          </a:xfrm>
+          <a:prstGeom prst="rect">
+            <a:avLst/>
+          </a:prstGeom>
+          <a:noFill/>
+        </p:spPr>
+        <p:txBody>
+          <a:bodyPr wrap="square" anchor="t" lIns="0" rIns="0" tIns="0" bIns="0">
+            <a:spAutoFit/>
+          </a:bodyPr>
+          <a:lstStyle/>
+          <a:p>
+            <a:pPr algn="ctr"/>
+            <a:r>
+              <a:rPr sz="1600" b="1">
+                <a:solidFill>
+                  <a:srgbClr val="FFFFFF"/>
+                </a:solidFill>
+                <a:latin typeface="微软雅黑"/>
+                <a:ea typeface="微软雅黑"/>
+                <a:cs typeface="微软雅黑"/>
+              </a:rPr>
+              <a:t>基础 · 必做</a:t>
+            </a:r>
+          </a:p>
+        </p:txBody>
+      </p:sp>
+      <p:sp>
+        <p:nvSpPr>
+          <p:cNvPr id="9" name="TextBox 8"/>
+          <p:cNvSpPr txBox="1"/>
+          <p:nvPr/>
+        </p:nvSpPr>
+        <p:spPr>
+          <a:xfrm>
+            <a:off x="914400" y="2788920"/>
+            <a:ext cx="4724247" cy="2971800"/>
+          </a:xfrm>
+          <a:prstGeom prst="rect">
+            <a:avLst/>
+          </a:prstGeom>
+          <a:noFill/>
+        </p:spPr>
+        <p:txBody>
+          <a:bodyPr wrap="square" anchor="t" lIns="0" rIns="0" tIns="0" bIns="0">
+            <a:spAutoFit/>
+          </a:bodyPr>
+          <a:lstStyle/>
+          <a:p>
+            <a:pPr algn="l">
+              <a:lnSpc>
+                <a:spcPct val="150000"/>
+              </a:lnSpc>
+            </a:pPr>
+            <a:r>
+              <a:rPr sz="1400" b="0">
+                <a:solidFill>
+                  <a:srgbClr val="1C2A33"/>
+                </a:solidFill>
+                <a:latin typeface="楷体"/>
+                <a:ea typeface="楷体"/>
+                <a:cs typeface="楷体"/>
+              </a:rPr>
+              <a:t>1. 提交单元反思单（三行完整）。2. 把本组最满意的成果（风物志/报告/倡议其一）誊清归档。</a:t>
+            </a:r>
+          </a:p>
+        </p:txBody>
+      </p:sp>
+      <p:sp>
+        <p:nvSpPr>
+          <p:cNvPr id="10" name="Rounded Rectangle 9"/>
+          <p:cNvSpPr/>
+          <p:nvPr/>
+        </p:nvSpPr>
+        <p:spPr>
+          <a:xfrm>
+            <a:off x="6278727" y="2011680"/>
+            <a:ext cx="5272887" cy="3931920"/>
+          </a:xfrm>
+          <a:prstGeom prst="roundRect">
+            <a:avLst/>
+          </a:prstGeom>
+          <a:solidFill>
+            <a:srgbClr val="FFFFFF"/>
+          </a:solidFill>
+          <a:ln w="20320">
+            <a:solidFill>
+              <a:srgbClr val="2E7D6B"/>
+            </a:solidFill>
+          </a:ln>
+          <a:effectLst/>
+        </p:spPr>
+        <p:style>
+          <a:lnRef idx="1">
+            <a:schemeClr val="accent1"/>
+          </a:lnRef>
+          <a:fillRef idx="3">
+            <a:schemeClr val="accent1"/>
+          </a:fillRef>
+          <a:effectRef idx="2">
+            <a:schemeClr val="accent1"/>
+          </a:effectRef>
+          <a:fontRef idx="minor">
+            <a:schemeClr val="lt1"/>
+          </a:fontRef>
+        </p:style>
+        <p:txBody>
+          <a:bodyPr rtlCol="0" anchor="ctr"/>
+          <a:lstStyle/>
+          <a:p>
+            <a:pPr algn="ctr"/>
+          </a:p>
+        </p:txBody>
+      </p:sp>
+      <p:sp>
+        <p:nvSpPr>
+          <p:cNvPr id="11" name="Rectangle 10"/>
+          <p:cNvSpPr/>
+          <p:nvPr/>
+        </p:nvSpPr>
+        <p:spPr>
+          <a:xfrm>
+            <a:off x="6278727" y="2011680"/>
+            <a:ext cx="5272887" cy="548640"/>
           </a:xfrm>
           <a:prstGeom prst="rect">
             <a:avLst/>
@@ -7576,60 +8158,14 @@
       </p:sp>
       <p:sp>
         <p:nvSpPr>
-          <p:cNvPr id="5" name="Rounded Rectangle 4"/>
-          <p:cNvSpPr/>
-          <p:nvPr/>
-        </p:nvSpPr>
-        <p:spPr>
-          <a:xfrm>
-            <a:off x="640080" y="1417320"/>
-            <a:ext cx="10911535" cy="1417320"/>
-          </a:xfrm>
-          <a:prstGeom prst="roundRect">
-            <a:avLst/>
-          </a:prstGeom>
-          <a:solidFill>
-            <a:srgbClr val="FFFFFF"/>
-          </a:solidFill>
-          <a:ln w="22860">
-            <a:solidFill>
-              <a:srgbClr val="2E7D6B"/>
-            </a:solidFill>
-          </a:ln>
-          <a:effectLst/>
-        </p:spPr>
-        <p:style>
-          <a:lnRef idx="1">
-            <a:schemeClr val="accent1"/>
-          </a:lnRef>
-          <a:fillRef idx="3">
-            <a:schemeClr val="accent1"/>
-          </a:fillRef>
-          <a:effectRef idx="2">
-            <a:schemeClr val="accent1"/>
-          </a:effectRef>
-          <a:fontRef idx="minor">
-            <a:schemeClr val="lt1"/>
-          </a:fontRef>
-        </p:style>
-        <p:txBody>
-          <a:bodyPr rtlCol="0" anchor="ctr"/>
-          <a:lstStyle/>
-          <a:p>
-            <a:pPr algn="ctr"/>
-          </a:p>
-        </p:txBody>
-      </p:sp>
-      <p:sp>
-        <p:nvSpPr>
-          <p:cNvPr id="6" name="TextBox 5"/>
+          <p:cNvPr id="12" name="TextBox 11"/>
           <p:cNvSpPr txBox="1"/>
           <p:nvPr/>
         </p:nvSpPr>
         <p:spPr>
           <a:xfrm>
-            <a:off x="1371600" y="1527048"/>
-            <a:ext cx="9997135" cy="457200"/>
+            <a:off x="6278727" y="2103120"/>
+            <a:ext cx="5272887" cy="365760"/>
           </a:xfrm>
           <a:prstGeom prst="rect">
             <a:avLst/>
@@ -7642,35 +8178,31 @@
           </a:bodyPr>
           <a:lstStyle/>
           <a:p>
-            <a:pPr algn="l">
-              <a:lnSpc>
-                <a:spcPct val="110000"/>
-              </a:lnSpc>
-            </a:pPr>
+            <a:pPr algn="ctr"/>
             <a:r>
               <a:rPr sz="1600" b="1">
                 <a:solidFill>
-                  <a:srgbClr val="1C2A33"/>
+                  <a:srgbClr val="FFFFFF"/>
                 </a:solidFill>
                 <a:latin typeface="微软雅黑"/>
                 <a:ea typeface="微软雅黑"/>
                 <a:cs typeface="微软雅黑"/>
               </a:rPr>
-              <a:t/>
-            </a:r>
-          </a:p>
-        </p:txBody>
-      </p:sp>
-      <p:sp>
-        <p:nvSpPr>
-          <p:cNvPr id="7" name="TextBox 6"/>
+              <a:t>提高 · 选做</a:t>
+            </a:r>
+          </a:p>
+        </p:txBody>
+      </p:sp>
+      <p:sp>
+        <p:nvSpPr>
+          <p:cNvPr id="13" name="TextBox 12"/>
           <p:cNvSpPr txBox="1"/>
           <p:nvPr/>
         </p:nvSpPr>
         <p:spPr>
           <a:xfrm>
-            <a:off x="1371600" y="1965960"/>
-            <a:ext cx="9997135" cy="777240"/>
+            <a:off x="6553047" y="2788920"/>
+            <a:ext cx="4724247" cy="2971800"/>
           </a:xfrm>
           <a:prstGeom prst="rect">
             <a:avLst/>
@@ -7685,11 +8217,11 @@
           <a:p>
             <a:pPr algn="l">
               <a:lnSpc>
-                <a:spcPct val="128000"/>
+                <a:spcPct val="150000"/>
               </a:lnSpc>
             </a:pPr>
             <a:r>
-              <a:rPr sz="1200" b="0">
+              <a:rPr sz="1400" b="0">
                 <a:solidFill>
                   <a:srgbClr val="1C2A33"/>
                 </a:solidFill>
@@ -7697,142 +8229,15 @@
                 <a:ea typeface="楷体"/>
                 <a:cs typeface="楷体"/>
               </a:rPr>
-              <a:t>【基础作业】1. 提交单元反思单（三行完整）。2. 把本组最满意的成果（风物志/报告/倡议其一）誊清归档。</a:t>
-            </a:r>
-          </a:p>
-        </p:txBody>
-      </p:sp>
-      <p:sp>
-        <p:nvSpPr>
-          <p:cNvPr id="8" name="Rounded Rectangle 7"/>
-          <p:cNvSpPr/>
-          <p:nvPr/>
-        </p:nvSpPr>
-        <p:spPr>
-          <a:xfrm>
-            <a:off x="640080" y="2971800"/>
-            <a:ext cx="10911535" cy="1417320"/>
-          </a:xfrm>
-          <a:prstGeom prst="roundRect">
-            <a:avLst/>
-          </a:prstGeom>
-          <a:solidFill>
-            <a:srgbClr val="FFFFFF"/>
-          </a:solidFill>
-          <a:ln w="22860">
-            <a:solidFill>
-              <a:srgbClr val="2E7D6B"/>
-            </a:solidFill>
-          </a:ln>
-          <a:effectLst/>
-        </p:spPr>
-        <p:style>
-          <a:lnRef idx="1">
-            <a:schemeClr val="accent1"/>
-          </a:lnRef>
-          <a:fillRef idx="3">
-            <a:schemeClr val="accent1"/>
-          </a:fillRef>
-          <a:effectRef idx="2">
-            <a:schemeClr val="accent1"/>
-          </a:effectRef>
-          <a:fontRef idx="minor">
-            <a:schemeClr val="lt1"/>
-          </a:fontRef>
-        </p:style>
-        <p:txBody>
-          <a:bodyPr rtlCol="0" anchor="ctr"/>
-          <a:lstStyle/>
-          <a:p>
-            <a:pPr algn="ctr"/>
-          </a:p>
-        </p:txBody>
-      </p:sp>
-      <p:sp>
-        <p:nvSpPr>
-          <p:cNvPr id="9" name="TextBox 8"/>
-          <p:cNvSpPr txBox="1"/>
-          <p:nvPr/>
-        </p:nvSpPr>
-        <p:spPr>
-          <a:xfrm>
-            <a:off x="1371600" y="3081528"/>
-            <a:ext cx="9997135" cy="457200"/>
-          </a:xfrm>
-          <a:prstGeom prst="rect">
-            <a:avLst/>
-          </a:prstGeom>
-          <a:noFill/>
-        </p:spPr>
-        <p:txBody>
-          <a:bodyPr wrap="square" anchor="t" lIns="0" rIns="0" tIns="0" bIns="0">
-            <a:spAutoFit/>
-          </a:bodyPr>
-          <a:lstStyle/>
-          <a:p>
-            <a:pPr algn="l">
-              <a:lnSpc>
-                <a:spcPct val="110000"/>
-              </a:lnSpc>
-            </a:pPr>
-            <a:r>
-              <a:rPr sz="1600" b="1">
-                <a:solidFill>
-                  <a:srgbClr val="1C2A33"/>
-                </a:solidFill>
-                <a:latin typeface="微软雅黑"/>
-                <a:ea typeface="微软雅黑"/>
-                <a:cs typeface="微软雅黑"/>
-              </a:rPr>
-              <a:t/>
-            </a:r>
-          </a:p>
-        </p:txBody>
-      </p:sp>
-      <p:sp>
-        <p:nvSpPr>
-          <p:cNvPr id="10" name="TextBox 9"/>
-          <p:cNvSpPr txBox="1"/>
-          <p:nvPr/>
-        </p:nvSpPr>
-        <p:spPr>
-          <a:xfrm>
-            <a:off x="1371600" y="3520440"/>
-            <a:ext cx="9997135" cy="777240"/>
-          </a:xfrm>
-          <a:prstGeom prst="rect">
-            <a:avLst/>
-          </a:prstGeom>
-          <a:noFill/>
-        </p:spPr>
-        <p:txBody>
-          <a:bodyPr wrap="square" anchor="t" lIns="0" rIns="0" tIns="0" bIns="0">
-            <a:spAutoFit/>
-          </a:bodyPr>
-          <a:lstStyle/>
-          <a:p>
-            <a:pPr algn="l">
-              <a:lnSpc>
-                <a:spcPct val="128000"/>
-              </a:lnSpc>
-            </a:pPr>
-            <a:r>
-              <a:rPr sz="1100" b="0">
-                <a:solidFill>
-                  <a:srgbClr val="1C2A33"/>
-                </a:solidFill>
-                <a:latin typeface="楷体"/>
-                <a:ea typeface="楷体"/>
-                <a:cs typeface="楷体"/>
-              </a:rPr>
-              <a:t>【提高作业】写150字「单元总结」，要求：①点明本单元最重要的一个能力；②举一次实践说明；③说一个想继续做的家乡文化行动。</a:t>
-            </a:r>
-          </a:p>
-        </p:txBody>
-      </p:sp>
-      <p:sp>
-        <p:nvSpPr>
-          <p:cNvPr id="11" name="TextBox 10"/>
+              <a:t>写150字「单元总结」，要求：①点明本单元最重要的一个能力；②举一次实践说明；③说一个想继续做的家乡文化行动。
+【</a:t>
+            </a:r>
+          </a:p>
+        </p:txBody>
+      </p:sp>
+      <p:sp>
+        <p:nvSpPr>
+          <p:cNvPr id="14" name="TextBox 13"/>
           <p:cNvSpPr txBox="1"/>
           <p:nvPr/>
         </p:nvSpPr>
@@ -7959,13 +8364,13 @@
             <a:r>
               <a:rPr sz="1300" b="1">
                 <a:solidFill>
-                  <a:srgbClr val="C8A86B"/>
+                  <a:srgbClr val="B23A2A"/>
                 </a:solidFill>
                 <a:latin typeface="微软雅黑"/>
                 <a:ea typeface="微软雅黑"/>
                 <a:cs typeface="微软雅黑"/>
               </a:rPr>
-              <a:t>本课小结</a:t>
+              <a:t>单元小结</a:t>
             </a:r>
           </a:p>
         </p:txBody>
@@ -7980,6 +8385,251 @@
           <a:xfrm>
             <a:off x="640080" y="1097280"/>
             <a:ext cx="822960" cy="30480"/>
+          </a:xfrm>
+          <a:prstGeom prst="rect">
+            <a:avLst/>
+          </a:prstGeom>
+          <a:solidFill>
+            <a:srgbClr val="B23A2A"/>
+          </a:solidFill>
+          <a:ln>
+            <a:noFill/>
+          </a:ln>
+          <a:effectLst/>
+        </p:spPr>
+        <p:style>
+          <a:lnRef idx="1">
+            <a:schemeClr val="accent1"/>
+          </a:lnRef>
+          <a:fillRef idx="3">
+            <a:schemeClr val="accent1"/>
+          </a:fillRef>
+          <a:effectRef idx="2">
+            <a:schemeClr val="accent1"/>
+          </a:effectRef>
+          <a:fontRef idx="minor">
+            <a:schemeClr val="lt1"/>
+          </a:fontRef>
+        </p:style>
+        <p:txBody>
+          <a:bodyPr rtlCol="0" anchor="ctr"/>
+          <a:lstStyle/>
+          <a:p>
+            <a:pPr algn="ctr"/>
+          </a:p>
+        </p:txBody>
+      </p:sp>
+      <p:sp>
+        <p:nvSpPr>
+          <p:cNvPr id="5" name="TextBox 4"/>
+          <p:cNvSpPr txBox="1"/>
+          <p:nvPr/>
+        </p:nvSpPr>
+        <p:spPr>
+          <a:xfrm>
+            <a:off x="640080" y="1280160"/>
+            <a:ext cx="10515600" cy="548640"/>
+          </a:xfrm>
+          <a:prstGeom prst="rect">
+            <a:avLst/>
+          </a:prstGeom>
+          <a:noFill/>
+        </p:spPr>
+        <p:txBody>
+          <a:bodyPr wrap="square" anchor="t" lIns="0" rIns="0" tIns="0" bIns="0">
+            <a:spAutoFit/>
+          </a:bodyPr>
+          <a:lstStyle/>
+          <a:p>
+            <a:pPr algn="l"/>
+            <a:r>
+              <a:rPr sz="2800" b="1">
+                <a:solidFill>
+                  <a:srgbClr val="1C2A33"/>
+                </a:solidFill>
+                <a:latin typeface="楷体"/>
+                <a:ea typeface="楷体"/>
+                <a:cs typeface="楷体"/>
+              </a:rPr>
+              <a:t>回到「家乡文化生活」</a:t>
+            </a:r>
+          </a:p>
+        </p:txBody>
+      </p:sp>
+      <p:sp>
+        <p:nvSpPr>
+          <p:cNvPr id="6" name="TextBox 5"/>
+          <p:cNvSpPr txBox="1"/>
+          <p:nvPr/>
+        </p:nvSpPr>
+        <p:spPr>
+          <a:xfrm>
+            <a:off x="640080" y="1965960"/>
+            <a:ext cx="5227167" cy="457200"/>
+          </a:xfrm>
+          <a:prstGeom prst="rect">
+            <a:avLst/>
+          </a:prstGeom>
+          <a:noFill/>
+        </p:spPr>
+        <p:txBody>
+          <a:bodyPr wrap="square" anchor="t" lIns="0" rIns="0" tIns="0" bIns="0">
+            <a:spAutoFit/>
+          </a:bodyPr>
+          <a:lstStyle/>
+          <a:p>
+            <a:pPr algn="l"/>
+            <a:r>
+              <a:rPr sz="1800" b="1">
+                <a:solidFill>
+                  <a:srgbClr val="B23A2A"/>
+                </a:solidFill>
+                <a:latin typeface="楷体"/>
+                <a:ea typeface="楷体"/>
+                <a:cs typeface="楷体"/>
+              </a:rPr>
+              <a:t>要点回望</a:t>
+            </a:r>
+          </a:p>
+        </p:txBody>
+      </p:sp>
+      <p:sp>
+        <p:nvSpPr>
+          <p:cNvPr id="7" name="TextBox 6"/>
+          <p:cNvSpPr txBox="1"/>
+          <p:nvPr/>
+        </p:nvSpPr>
+        <p:spPr>
+          <a:xfrm>
+            <a:off x="640080" y="2468880"/>
+            <a:ext cx="5227167" cy="3657600"/>
+          </a:xfrm>
+          <a:prstGeom prst="rect">
+            <a:avLst/>
+          </a:prstGeom>
+          <a:noFill/>
+        </p:spPr>
+        <p:txBody>
+          <a:bodyPr wrap="square" anchor="t" lIns="0" rIns="0" tIns="0" bIns="0">
+            <a:spAutoFit/>
+          </a:bodyPr>
+          <a:lstStyle/>
+          <a:p>
+            <a:pPr algn="l">
+              <a:lnSpc>
+                <a:spcPct val="145000"/>
+              </a:lnSpc>
+              <a:spcAft>
+                <a:spcPts val="1000"/>
+              </a:spcAft>
+            </a:pPr>
+            <a:r>
+              <a:rPr sz="1400" b="0">
+                <a:solidFill>
+                  <a:srgbClr val="1C2A33"/>
+                </a:solidFill>
+                <a:latin typeface="楷体"/>
+                <a:ea typeface="楷体"/>
+                <a:cs typeface="楷体"/>
+              </a:rPr>
+              <a:t>· 成果展：风物卡/口述卡贴墙，倡议书张贴。</a:t>
+            </a:r>
+          </a:p>
+          <a:p>
+            <a:pPr algn="l">
+              <a:lnSpc>
+                <a:spcPct val="145000"/>
+              </a:lnSpc>
+              <a:spcAft>
+                <a:spcPts val="1000"/>
+              </a:spcAft>
+            </a:pPr>
+            <a:r>
+              <a:rPr sz="1400" b="0">
+                <a:solidFill>
+                  <a:srgbClr val="1C2A33"/>
+                </a:solidFill>
+                <a:latin typeface="楷体"/>
+                <a:ea typeface="楷体"/>
+                <a:cs typeface="楷体"/>
+              </a:rPr>
+              <a:t>· 代表分享：每组3分钟，讲清「我们做了什么、发现了什么、倡议什么」。</a:t>
+            </a:r>
+          </a:p>
+          <a:p>
+            <a:pPr algn="l">
+              <a:lnSpc>
+                <a:spcPct val="145000"/>
+              </a:lnSpc>
+              <a:spcAft>
+                <a:spcPts val="1000"/>
+              </a:spcAft>
+            </a:pPr>
+            <a:r>
+              <a:rPr sz="1400" b="0">
+                <a:solidFill>
+                  <a:srgbClr val="1C2A33"/>
+                </a:solidFill>
+                <a:latin typeface="楷体"/>
+                <a:ea typeface="楷体"/>
+                <a:cs typeface="楷体"/>
+              </a:rPr>
+              <a:t>· 反思单：回顾路径——调查(方法)→撰写(成文)→倡议(行动)。</a:t>
+            </a:r>
+          </a:p>
+        </p:txBody>
+      </p:sp>
+      <p:sp>
+        <p:nvSpPr>
+          <p:cNvPr id="8" name="Rounded Rectangle 7"/>
+          <p:cNvSpPr/>
+          <p:nvPr/>
+        </p:nvSpPr>
+        <p:spPr>
+          <a:xfrm>
+            <a:off x="6324447" y="1965960"/>
+            <a:ext cx="5227167" cy="4160520"/>
+          </a:xfrm>
+          <a:prstGeom prst="roundRect">
+            <a:avLst/>
+          </a:prstGeom>
+          <a:solidFill>
+            <a:srgbClr val="1C2A33"/>
+          </a:solidFill>
+          <a:effectLst/>
+        </p:spPr>
+        <p:style>
+          <a:lnRef idx="1">
+            <a:schemeClr val="accent1"/>
+          </a:lnRef>
+          <a:fillRef idx="3">
+            <a:schemeClr val="accent1"/>
+          </a:fillRef>
+          <a:effectRef idx="2">
+            <a:schemeClr val="accent1"/>
+          </a:effectRef>
+          <a:fontRef idx="minor">
+            <a:schemeClr val="lt1"/>
+          </a:fontRef>
+        </p:style>
+        <p:txBody>
+          <a:bodyPr rtlCol="0" anchor="ctr"/>
+          <a:lstStyle/>
+          <a:p>
+            <a:pPr algn="ctr"/>
+          </a:p>
+        </p:txBody>
+      </p:sp>
+      <p:sp>
+        <p:nvSpPr>
+          <p:cNvPr id="9" name="Rectangle 8"/>
+          <p:cNvSpPr/>
+          <p:nvPr/>
+        </p:nvSpPr>
+        <p:spPr>
+          <a:xfrm>
+            <a:off x="6598767" y="2240280"/>
+            <a:ext cx="54864" cy="330200"/>
           </a:xfrm>
           <a:prstGeom prst="rect">
             <a:avLst/>
@@ -8016,58 +8666,14 @@
       </p:sp>
       <p:sp>
         <p:nvSpPr>
-          <p:cNvPr id="5" name="Rectangle 4"/>
-          <p:cNvSpPr/>
-          <p:nvPr/>
-        </p:nvSpPr>
-        <p:spPr>
-          <a:xfrm>
-            <a:off x="640080" y="1737360"/>
-            <a:ext cx="54864" cy="431800"/>
-          </a:xfrm>
-          <a:prstGeom prst="rect">
-            <a:avLst/>
-          </a:prstGeom>
-          <a:solidFill>
-            <a:srgbClr val="C8A86B"/>
-          </a:solidFill>
-          <a:ln>
-            <a:noFill/>
-          </a:ln>
-          <a:effectLst/>
-        </p:spPr>
-        <p:style>
-          <a:lnRef idx="1">
-            <a:schemeClr val="accent1"/>
-          </a:lnRef>
-          <a:fillRef idx="3">
-            <a:schemeClr val="accent1"/>
-          </a:fillRef>
-          <a:effectRef idx="2">
-            <a:schemeClr val="accent1"/>
-          </a:effectRef>
-          <a:fontRef idx="minor">
-            <a:schemeClr val="lt1"/>
-          </a:fontRef>
-        </p:style>
-        <p:txBody>
-          <a:bodyPr rtlCol="0" anchor="ctr"/>
-          <a:lstStyle/>
-          <a:p>
-            <a:pPr algn="ctr"/>
-          </a:p>
-        </p:txBody>
-      </p:sp>
-      <p:sp>
-        <p:nvSpPr>
-          <p:cNvPr id="6" name="TextBox 5"/>
+          <p:cNvPr id="10" name="TextBox 9"/>
           <p:cNvSpPr txBox="1"/>
           <p:nvPr/>
         </p:nvSpPr>
         <p:spPr>
           <a:xfrm>
-            <a:off x="868680" y="1645920"/>
-            <a:ext cx="10682935" cy="2194560"/>
+            <a:off x="6781647" y="2286000"/>
+            <a:ext cx="4495647" cy="457200"/>
           </a:xfrm>
           <a:prstGeom prst="rect">
             <a:avLst/>
@@ -8080,45 +8686,65 @@
           </a:bodyPr>
           <a:lstStyle/>
           <a:p>
-            <a:pPr algn="l">
-              <a:lnSpc>
-                <a:spcPct val="150000"/>
-              </a:lnSpc>
-              <a:spcAft>
-                <a:spcPts val="1000"/>
-              </a:spcAft>
-            </a:pPr>
-            <a:r>
-              <a:rPr sz="2200" b="0">
-                <a:solidFill>
-                  <a:srgbClr val="1C2A33"/>
+            <a:pPr algn="l"/>
+            <a:r>
+              <a:rPr sz="1700" b="1">
+                <a:solidFill>
+                  <a:srgbClr val="C8A86B"/>
                 </a:solidFill>
                 <a:latin typeface="楷体"/>
                 <a:ea typeface="楷体"/>
                 <a:cs typeface="楷体"/>
               </a:rPr>
-              <a:t>本单元主题：家乡文化生活。把今天学到的方法带进下一篇——自己读、自己想、自己写。</a:t>
-            </a:r>
-          </a:p>
-          <a:p>
-            <a:pPr algn="l"/>
-            <a:r>
-              <a:rPr sz="1600" b="1">
-                <a:solidFill>
-                  <a:srgbClr val="B23A2A"/>
-                </a:solidFill>
-                <a:latin typeface="微软雅黑"/>
-                <a:ea typeface="微软雅黑"/>
-                <a:cs typeface="微软雅黑"/>
+              <a:t>反思引导</a:t>
+            </a:r>
+          </a:p>
+        </p:txBody>
+      </p:sp>
+      <p:sp>
+        <p:nvSpPr>
+          <p:cNvPr id="11" name="TextBox 10"/>
+          <p:cNvSpPr txBox="1"/>
+          <p:nvPr/>
+        </p:nvSpPr>
+        <p:spPr>
+          <a:xfrm>
+            <a:off x="6781647" y="2834640"/>
+            <a:ext cx="4495647" cy="3108960"/>
+          </a:xfrm>
+          <a:prstGeom prst="rect">
+            <a:avLst/>
+          </a:prstGeom>
+          <a:noFill/>
+        </p:spPr>
+        <p:txBody>
+          <a:bodyPr wrap="square" anchor="t" lIns="0" rIns="0" tIns="0" bIns="0">
+            <a:spAutoFit/>
+          </a:bodyPr>
+          <a:lstStyle/>
+          <a:p>
+            <a:pPr algn="l">
+              <a:lnSpc>
+                <a:spcPct val="155000"/>
+              </a:lnSpc>
+            </a:pPr>
+            <a:r>
+              <a:rPr sz="1500" b="0">
+                <a:solidFill>
+                  <a:srgbClr val="FFFFFF"/>
+                </a:solidFill>
+                <a:latin typeface="楷体"/>
+                <a:ea typeface="楷体"/>
+                <a:cs typeface="楷体"/>
               </a:rPr>
-              <a:t>方法迁移：圈关键信息 → 理事件脉络 → 析人物精神</a:t>
-            </a:r>
-          </a:p>
-        </p:txBody>
-      </p:sp>
-      <p:sp>
-        <p:nvSpPr>
-          <p:cNvPr id="7" name="TextBox 6"/>
+              <a:t>这次“看→写→做”，你为家乡做的一件小事是什么？还能继续做什么？</a:t>
+            </a:r>
+          </a:p>
+        </p:txBody>
+      </p:sp>
+      <p:sp>
+        <p:nvSpPr>
+          <p:cNvPr id="12" name="TextBox 11"/>
           <p:cNvSpPr txBox="1"/>
           <p:nvPr/>
         </p:nvSpPr>
